--- a/mon/dia_li/slide/lop12/Slide_DIALY12_Bài_18_Tổ_chức_lãnh_thổ_CN_TT33.pptx
+++ b/mon/dia_li/slide/lop12/Slide_DIALY12_Bài_18_Tổ_chức_lãnh_thổ_CN_TT33.pptx
@@ -12,6 +12,7 @@
     <p:sldId id="260" r:id="rId11"/>
     <p:sldId id="261" r:id="rId12"/>
     <p:sldId id="262" r:id="rId13"/>
+    <p:sldId id="263" r:id="rId14"/>
   </p:sldIdLst>
   <p:sldSz cx="12188952" cy="6858000" type="screen4x3"/>
   <p:notesSz cx="6858000" cy="9144000"/>
@@ -3575,7 +3576,7 @@
                 </a:solidFill>
                 <a:latin typeface="Calibri"/>
               </a:rPr>
-              <a:t>Phân tích các hình thức tổ chức lãnh thổ công nghiệp</a:t>
+              <a:t>Phân tích các hình thức tổ chức lãnh thổ CN</a:t>
             </a:r>
           </a:p>
         </p:txBody>
@@ -3688,7 +3689,7 @@
                 </a:solidFill>
                 <a:latin typeface="Calibri"/>
               </a:rPr>
-              <a:t>Đánh giá KCN và KKT ở Việt Nam</a:t>
+              <a:t>Đánh giá KCN và KKT</a:t>
             </a:r>
           </a:p>
         </p:txBody>
@@ -3707,7 +3708,7 @@
     <p:bg>
       <p:bgPr>
         <a:solidFill>
-          <a:srgbClr val="FFFFFF"/>
+          <a:srgbClr val="F8F9FA"/>
         </a:solidFill>
         <a:effectLst/>
       </p:bgPr>
@@ -3727,8 +3728,8 @@
         </p:nvSpPr>
         <p:spPr>
           <a:xfrm>
-            <a:off x="274320" y="182880"/>
-            <a:ext cx="2011680" cy="502920"/>
+            <a:off x="0" y="0"/>
+            <a:ext cx="12188952" cy="621792"/>
           </a:xfrm>
           <a:prstGeom prst="rect">
             <a:avLst/>
@@ -3770,8 +3771,8 @@
         </p:nvSpPr>
         <p:spPr>
           <a:xfrm>
-            <a:off x="274320" y="182880"/>
-            <a:ext cx="2011680" cy="502920"/>
+            <a:off x="274320" y="64008"/>
+            <a:ext cx="4114800" cy="347472"/>
           </a:xfrm>
           <a:prstGeom prst="rect">
             <a:avLst/>
@@ -3782,6 +3783,95 @@
           <a:bodyPr wrap="square">
             <a:spAutoFit/>
           </a:bodyPr>
+          <a:lstStyle/>
+          <a:p>
+            <a:pPr algn="l"/>
+            <a:r>
+              <a:rPr sz="2000" b="1">
+                <a:solidFill>
+                  <a:srgbClr val="FFFFFF"/>
+                </a:solidFill>
+                <a:latin typeface="Arial"/>
+              </a:rPr>
+              <a:t>SO DO TU DUY</a:t>
+            </a:r>
+          </a:p>
+        </p:txBody>
+      </p:sp>
+      <p:sp>
+        <p:nvSpPr>
+          <p:cNvPr id="4" name="TextBox 3"/>
+          <p:cNvSpPr txBox="1"/>
+          <p:nvPr/>
+        </p:nvSpPr>
+        <p:spPr>
+          <a:xfrm>
+            <a:off x="4572000" y="64008"/>
+            <a:ext cx="7342632" cy="347472"/>
+          </a:xfrm>
+          <a:prstGeom prst="rect">
+            <a:avLst/>
+          </a:prstGeom>
+          <a:noFill/>
+        </p:spPr>
+        <p:txBody>
+          <a:bodyPr wrap="square">
+            <a:spAutoFit/>
+          </a:bodyPr>
+          <a:lstStyle/>
+          <a:p>
+            <a:pPr algn="l"/>
+            <a:r>
+              <a:rPr sz="1300" b="0">
+                <a:solidFill>
+                  <a:srgbClr val="FFFFFF"/>
+                </a:solidFill>
+                <a:latin typeface="Calibri"/>
+              </a:rPr>
+              <a:t>ĐỊA LÍ 12  |  Bài 18. Tổ chức lãnh thổ CN</a:t>
+            </a:r>
+          </a:p>
+        </p:txBody>
+      </p:sp>
+      <p:sp>
+        <p:nvSpPr>
+          <p:cNvPr id="5" name="Rounded Rectangle 4"/>
+          <p:cNvSpPr/>
+          <p:nvPr/>
+        </p:nvSpPr>
+        <p:spPr>
+          <a:xfrm>
+            <a:off x="3808476" y="804672"/>
+            <a:ext cx="4572000" cy="640080"/>
+          </a:xfrm>
+          <a:prstGeom prst="roundRect">
+            <a:avLst/>
+          </a:prstGeom>
+          <a:solidFill>
+            <a:srgbClr val="1E40AF"/>
+          </a:solidFill>
+          <a:ln>
+            <a:solidFill>
+              <a:srgbClr val="1E40AF"/>
+            </a:solidFill>
+          </a:ln>
+        </p:spPr>
+        <p:style>
+          <a:lnRef idx="1">
+            <a:schemeClr val="accent1"/>
+          </a:lnRef>
+          <a:fillRef idx="3">
+            <a:schemeClr val="accent1"/>
+          </a:fillRef>
+          <a:effectRef idx="2">
+            <a:schemeClr val="accent1"/>
+          </a:effectRef>
+          <a:fontRef idx="minor">
+            <a:schemeClr val="lt1"/>
+          </a:fontRef>
+        </p:style>
+        <p:txBody>
+          <a:bodyPr rtlCol="0" anchor="ctr" wrap="none"/>
           <a:lstStyle/>
           <a:p>
             <a:pPr algn="ctr"/>
@@ -3792,65 +3882,67 @@
                 </a:solidFill>
                 <a:latin typeface="Arial"/>
               </a:rPr>
-              <a:t>ĐỀ BÀI – NỘI DUNG 1</a:t>
-            </a:r>
-          </a:p>
-        </p:txBody>
-      </p:sp>
-      <p:sp>
-        <p:nvSpPr>
-          <p:cNvPr id="4" name="TextBox 3"/>
-          <p:cNvSpPr txBox="1"/>
-          <p:nvPr/>
-        </p:nvSpPr>
-        <p:spPr>
-          <a:xfrm>
-            <a:off x="274320" y="777240"/>
-            <a:ext cx="11640312" cy="594360"/>
-          </a:xfrm>
-          <a:prstGeom prst="rect">
-            <a:avLst/>
-          </a:prstGeom>
-          <a:noFill/>
-        </p:spPr>
-        <p:txBody>
-          <a:bodyPr wrap="square">
-            <a:spAutoFit/>
-          </a:bodyPr>
-          <a:lstStyle/>
-          <a:p>
-            <a:pPr algn="l"/>
-            <a:r>
-              <a:rPr sz="2600" b="1">
-                <a:solidFill>
-                  <a:srgbClr val="1E40AF"/>
-                </a:solidFill>
-                <a:latin typeface="Arial"/>
-              </a:rPr>
-              <a:t>Hình thức tổ chức lãnh thổ CN</a:t>
-            </a:r>
-          </a:p>
-        </p:txBody>
-      </p:sp>
-      <p:sp>
-        <p:nvSpPr>
-          <p:cNvPr id="5" name="Rectangle 4"/>
+              <a:t>Bài 18. Tổ chức lãnh thổ CN</a:t>
+            </a:r>
+          </a:p>
+        </p:txBody>
+      </p:sp>
+      <p:cxnSp>
+        <p:nvCxnSpPr>
+          <p:cNvPr id="6" name="Connector 5"/>
+          <p:cNvCxnSpPr/>
+          <p:nvPr/>
+        </p:nvCxnSpPr>
+        <p:spPr>
+          <a:xfrm flipH="1">
+            <a:off x="1412748.0" y="1124712.0"/>
+            <a:ext cx="4681728.0" cy="864108.0"/>
+          </a:xfrm>
+          <a:prstGeom prst="line">
+            <a:avLst/>
+          </a:prstGeom>
+          <a:ln w="22860">
+            <a:solidFill>
+              <a:srgbClr val="7C3AED"/>
+            </a:solidFill>
+          </a:ln>
+        </p:spPr>
+        <p:style>
+          <a:lnRef idx="2">
+            <a:schemeClr val="accent1"/>
+          </a:lnRef>
+          <a:fillRef idx="0">
+            <a:schemeClr val="accent1"/>
+          </a:fillRef>
+          <a:effectRef idx="1">
+            <a:schemeClr val="accent1"/>
+          </a:effectRef>
+          <a:fontRef idx="minor">
+            <a:schemeClr val="tx1"/>
+          </a:fontRef>
+        </p:style>
+      </p:cxnSp>
+      <p:sp>
+        <p:nvSpPr>
+          <p:cNvPr id="7" name="Oval 6"/>
           <p:cNvSpPr/>
           <p:nvPr/>
         </p:nvSpPr>
         <p:spPr>
           <a:xfrm>
-            <a:off x="274320" y="1417320"/>
-            <a:ext cx="11640312" cy="36576"/>
-          </a:xfrm>
-          <a:prstGeom prst="rect">
+            <a:off x="109728" y="1691640"/>
+            <a:ext cx="2606040" cy="594360"/>
+          </a:xfrm>
+          <a:prstGeom prst="ellipse">
             <a:avLst/>
           </a:prstGeom>
           <a:solidFill>
-            <a:srgbClr val="1E40AF"/>
+            <a:srgbClr val="7C3AED"/>
           </a:solidFill>
           <a:ln>
-            <a:noFill/>
+            <a:solidFill>
+              <a:srgbClr val="7C3AED"/>
+            </a:solidFill>
           </a:ln>
         </p:spPr>
         <p:style>
@@ -3868,72 +3960,78 @@
           </a:fontRef>
         </p:style>
         <p:txBody>
-          <a:bodyPr rtlCol="0" anchor="ctr"/>
+          <a:bodyPr rtlCol="0" anchor="ctr" wrap="square"/>
           <a:lstStyle/>
           <a:p>
             <a:pPr algn="ctr"/>
-          </a:p>
-        </p:txBody>
-      </p:sp>
-      <p:sp>
-        <p:nvSpPr>
-          <p:cNvPr id="6" name="TextBox 5"/>
-          <p:cNvSpPr txBox="1"/>
-          <p:nvPr/>
-        </p:nvSpPr>
-        <p:spPr>
-          <a:xfrm>
-            <a:off x="274320" y="1508760"/>
-            <a:ext cx="11640312" cy="3840480"/>
-          </a:xfrm>
-          <a:prstGeom prst="rect">
-            <a:avLst/>
-          </a:prstGeom>
-          <a:noFill/>
-        </p:spPr>
-        <p:txBody>
-          <a:bodyPr wrap="square">
-            <a:spAutoFit/>
-          </a:bodyPr>
-          <a:lstStyle/>
-          <a:p>
-            <a:pPr algn="l"/>
-            <a:r>
-              <a:rPr sz="2200" b="0">
+            <a:r>
+              <a:rPr sz="1300" b="1">
                 <a:solidFill>
-                  <a:srgbClr val="1E293B"/>
+                  <a:srgbClr val="FFFFFF"/>
                 </a:solidFill>
-                <a:latin typeface="Calibri"/>
+                <a:latin typeface="Arial"/>
               </a:rPr>
-              <a:t>Từ đơn giản → phức tạp:
-1. Điểm CN: cơ sở SX đơn lẻ ở vùng nông thôn
-2. Khu CN (KCN): tập trung nhiều xí nghiệp, có hạ tầng chung
-3. Trung tâm CN: tập hợp KCN + DV liên quan
-4. Vùng CN: không gian rộng, nhiều trung tâm
-KKT ven biển: đa chức năng (CN + DV + đô thị + cảng)</a:t>
-            </a:r>
-          </a:p>
-        </p:txBody>
-      </p:sp>
-      <p:sp>
-        <p:nvSpPr>
-          <p:cNvPr id="7" name="Rectangle 6"/>
+              <a:t>Các hình thức tổ chức</a:t>
+            </a:r>
+          </a:p>
+        </p:txBody>
+      </p:sp>
+      <p:cxnSp>
+        <p:nvCxnSpPr>
+          <p:cNvPr id="8" name="Connector 7"/>
+          <p:cNvCxnSpPr/>
+          <p:nvPr/>
+        </p:nvCxnSpPr>
+        <p:spPr>
+          <a:xfrm flipV="1">
+            <a:off x="1412748.0" y="1568196.0"/>
+            <a:ext cx="2839212.0" cy="420624.0"/>
+          </a:xfrm>
+          <a:prstGeom prst="line">
+            <a:avLst/>
+          </a:prstGeom>
+          <a:ln w="12700">
+            <a:solidFill>
+              <a:srgbClr val="7C3AED"/>
+            </a:solidFill>
+          </a:ln>
+        </p:spPr>
+        <p:style>
+          <a:lnRef idx="2">
+            <a:schemeClr val="accent1"/>
+          </a:lnRef>
+          <a:fillRef idx="0">
+            <a:schemeClr val="accent1"/>
+          </a:fillRef>
+          <a:effectRef idx="1">
+            <a:schemeClr val="accent1"/>
+          </a:effectRef>
+          <a:fontRef idx="minor">
+            <a:schemeClr val="tx1"/>
+          </a:fontRef>
+        </p:style>
+      </p:cxnSp>
+      <p:sp>
+        <p:nvSpPr>
+          <p:cNvPr id="9" name="Rounded Rectangle 8"/>
           <p:cNvSpPr/>
           <p:nvPr/>
         </p:nvSpPr>
         <p:spPr>
           <a:xfrm>
-            <a:off x="274320" y="5760720"/>
-            <a:ext cx="11640312" cy="685800"/>
-          </a:xfrm>
-          <a:prstGeom prst="rect">
+            <a:off x="2880360" y="1399032"/>
+            <a:ext cx="2743200" cy="338328"/>
+          </a:xfrm>
+          <a:prstGeom prst="roundRect">
             <a:avLst/>
           </a:prstGeom>
           <a:solidFill>
-            <a:srgbClr val="E0F2FE"/>
+            <a:srgbClr val="EDE9FE"/>
           </a:solidFill>
           <a:ln>
-            <a:noFill/>
+            <a:solidFill>
+              <a:srgbClr val="EDE9FE"/>
+            </a:solidFill>
           </a:ln>
         </p:spPr>
         <p:style>
@@ -3951,44 +4049,1264 @@
           </a:fontRef>
         </p:style>
         <p:txBody>
-          <a:bodyPr rtlCol="0" anchor="ctr"/>
-          <a:lstStyle/>
-          <a:p>
-            <a:pPr algn="ctr"/>
-          </a:p>
-        </p:txBody>
-      </p:sp>
-      <p:sp>
-        <p:nvSpPr>
-          <p:cNvPr id="8" name="TextBox 7"/>
-          <p:cNvSpPr txBox="1"/>
-          <p:nvPr/>
-        </p:nvSpPr>
-        <p:spPr>
-          <a:xfrm>
-            <a:off x="365760" y="5806440"/>
-            <a:ext cx="11457432" cy="594360"/>
-          </a:xfrm>
-          <a:prstGeom prst="rect">
-            <a:avLst/>
-          </a:prstGeom>
-          <a:noFill/>
-        </p:spPr>
-        <p:txBody>
-          <a:bodyPr wrap="square">
-            <a:spAutoFit/>
-          </a:bodyPr>
+          <a:bodyPr rtlCol="0" anchor="ctr" wrap="square"/>
           <a:lstStyle/>
           <a:p>
             <a:pPr algn="l"/>
             <a:r>
-              <a:rPr sz="1800" b="0">
+              <a:rPr sz="1200" b="0">
                 <a:solidFill>
-                  <a:srgbClr val="1E40AF"/>
+                  <a:srgbClr val="4C1D95"/>
                 </a:solidFill>
                 <a:latin typeface="Calibri"/>
               </a:rPr>
-              <a:t>💡 Suy nghĩ và thảo luận nhóm.</a:t>
+              <a:t>Điểm CN đơn lẻ</a:t>
+            </a:r>
+          </a:p>
+        </p:txBody>
+      </p:sp>
+      <p:cxnSp>
+        <p:nvCxnSpPr>
+          <p:cNvPr id="10" name="Connector 9"/>
+          <p:cNvCxnSpPr/>
+          <p:nvPr/>
+        </p:nvCxnSpPr>
+        <p:spPr>
+          <a:xfrm>
+            <a:off x="1412748.0" y="1988820.0"/>
+            <a:ext cx="2839212.0" cy="0.0"/>
+          </a:xfrm>
+          <a:prstGeom prst="line">
+            <a:avLst/>
+          </a:prstGeom>
+          <a:ln w="12700">
+            <a:solidFill>
+              <a:srgbClr val="7C3AED"/>
+            </a:solidFill>
+          </a:ln>
+        </p:spPr>
+        <p:style>
+          <a:lnRef idx="2">
+            <a:schemeClr val="accent1"/>
+          </a:lnRef>
+          <a:fillRef idx="0">
+            <a:schemeClr val="accent1"/>
+          </a:fillRef>
+          <a:effectRef idx="1">
+            <a:schemeClr val="accent1"/>
+          </a:effectRef>
+          <a:fontRef idx="minor">
+            <a:schemeClr val="tx1"/>
+          </a:fontRef>
+        </p:style>
+      </p:cxnSp>
+      <p:sp>
+        <p:nvSpPr>
+          <p:cNvPr id="11" name="Rounded Rectangle 10"/>
+          <p:cNvSpPr/>
+          <p:nvPr/>
+        </p:nvSpPr>
+        <p:spPr>
+          <a:xfrm>
+            <a:off x="2880360" y="1819656"/>
+            <a:ext cx="2743200" cy="338328"/>
+          </a:xfrm>
+          <a:prstGeom prst="roundRect">
+            <a:avLst/>
+          </a:prstGeom>
+          <a:solidFill>
+            <a:srgbClr val="EDE9FE"/>
+          </a:solidFill>
+          <a:ln>
+            <a:solidFill>
+              <a:srgbClr val="EDE9FE"/>
+            </a:solidFill>
+          </a:ln>
+        </p:spPr>
+        <p:style>
+          <a:lnRef idx="1">
+            <a:schemeClr val="accent1"/>
+          </a:lnRef>
+          <a:fillRef idx="3">
+            <a:schemeClr val="accent1"/>
+          </a:fillRef>
+          <a:effectRef idx="2">
+            <a:schemeClr val="accent1"/>
+          </a:effectRef>
+          <a:fontRef idx="minor">
+            <a:schemeClr val="lt1"/>
+          </a:fontRef>
+        </p:style>
+        <p:txBody>
+          <a:bodyPr rtlCol="0" anchor="ctr" wrap="square"/>
+          <a:lstStyle/>
+          <a:p>
+            <a:pPr algn="l"/>
+            <a:r>
+              <a:rPr sz="1200" b="0">
+                <a:solidFill>
+                  <a:srgbClr val="4C1D95"/>
+                </a:solidFill>
+                <a:latin typeface="Calibri"/>
+              </a:rPr>
+              <a:t>KCN tập trung</a:t>
+            </a:r>
+          </a:p>
+        </p:txBody>
+      </p:sp>
+      <p:cxnSp>
+        <p:nvCxnSpPr>
+          <p:cNvPr id="12" name="Connector 11"/>
+          <p:cNvCxnSpPr/>
+          <p:nvPr/>
+        </p:nvCxnSpPr>
+        <p:spPr>
+          <a:xfrm>
+            <a:off x="1412748.0" y="1988820.0"/>
+            <a:ext cx="2839212.0" cy="420624.0"/>
+          </a:xfrm>
+          <a:prstGeom prst="line">
+            <a:avLst/>
+          </a:prstGeom>
+          <a:ln w="12700">
+            <a:solidFill>
+              <a:srgbClr val="7C3AED"/>
+            </a:solidFill>
+          </a:ln>
+        </p:spPr>
+        <p:style>
+          <a:lnRef idx="2">
+            <a:schemeClr val="accent1"/>
+          </a:lnRef>
+          <a:fillRef idx="0">
+            <a:schemeClr val="accent1"/>
+          </a:fillRef>
+          <a:effectRef idx="1">
+            <a:schemeClr val="accent1"/>
+          </a:effectRef>
+          <a:fontRef idx="minor">
+            <a:schemeClr val="tx1"/>
+          </a:fontRef>
+        </p:style>
+      </p:cxnSp>
+      <p:sp>
+        <p:nvSpPr>
+          <p:cNvPr id="13" name="Rounded Rectangle 12"/>
+          <p:cNvSpPr/>
+          <p:nvPr/>
+        </p:nvSpPr>
+        <p:spPr>
+          <a:xfrm>
+            <a:off x="2880360" y="2240280"/>
+            <a:ext cx="2743200" cy="338328"/>
+          </a:xfrm>
+          <a:prstGeom prst="roundRect">
+            <a:avLst/>
+          </a:prstGeom>
+          <a:solidFill>
+            <a:srgbClr val="EDE9FE"/>
+          </a:solidFill>
+          <a:ln>
+            <a:solidFill>
+              <a:srgbClr val="EDE9FE"/>
+            </a:solidFill>
+          </a:ln>
+        </p:spPr>
+        <p:style>
+          <a:lnRef idx="1">
+            <a:schemeClr val="accent1"/>
+          </a:lnRef>
+          <a:fillRef idx="3">
+            <a:schemeClr val="accent1"/>
+          </a:fillRef>
+          <a:effectRef idx="2">
+            <a:schemeClr val="accent1"/>
+          </a:effectRef>
+          <a:fontRef idx="minor">
+            <a:schemeClr val="lt1"/>
+          </a:fontRef>
+        </p:style>
+        <p:txBody>
+          <a:bodyPr rtlCol="0" anchor="ctr" wrap="square"/>
+          <a:lstStyle/>
+          <a:p>
+            <a:pPr algn="l"/>
+            <a:r>
+              <a:rPr sz="1200" b="0">
+                <a:solidFill>
+                  <a:srgbClr val="4C1D95"/>
+                </a:solidFill>
+                <a:latin typeface="Calibri"/>
+              </a:rPr>
+              <a:t>KKT ven biển</a:t>
+            </a:r>
+          </a:p>
+        </p:txBody>
+      </p:sp>
+      <p:cxnSp>
+        <p:nvCxnSpPr>
+          <p:cNvPr id="14" name="Connector 13"/>
+          <p:cNvCxnSpPr/>
+          <p:nvPr/>
+        </p:nvCxnSpPr>
+        <p:spPr>
+          <a:xfrm flipH="1">
+            <a:off x="1412748.0" y="1124712.0"/>
+            <a:ext cx="4681728.0" cy="3058668.0"/>
+          </a:xfrm>
+          <a:prstGeom prst="line">
+            <a:avLst/>
+          </a:prstGeom>
+          <a:ln w="22860">
+            <a:solidFill>
+              <a:srgbClr val="065F46"/>
+            </a:solidFill>
+          </a:ln>
+        </p:spPr>
+        <p:style>
+          <a:lnRef idx="2">
+            <a:schemeClr val="accent1"/>
+          </a:lnRef>
+          <a:fillRef idx="0">
+            <a:schemeClr val="accent1"/>
+          </a:fillRef>
+          <a:effectRef idx="1">
+            <a:schemeClr val="accent1"/>
+          </a:effectRef>
+          <a:fontRef idx="minor">
+            <a:schemeClr val="tx1"/>
+          </a:fontRef>
+        </p:style>
+      </p:cxnSp>
+      <p:sp>
+        <p:nvSpPr>
+          <p:cNvPr id="15" name="Oval 14"/>
+          <p:cNvSpPr/>
+          <p:nvPr/>
+        </p:nvSpPr>
+        <p:spPr>
+          <a:xfrm>
+            <a:off x="109728" y="3886200"/>
+            <a:ext cx="2606040" cy="594360"/>
+          </a:xfrm>
+          <a:prstGeom prst="ellipse">
+            <a:avLst/>
+          </a:prstGeom>
+          <a:solidFill>
+            <a:srgbClr val="065F46"/>
+          </a:solidFill>
+          <a:ln>
+            <a:solidFill>
+              <a:srgbClr val="065F46"/>
+            </a:solidFill>
+          </a:ln>
+        </p:spPr>
+        <p:style>
+          <a:lnRef idx="1">
+            <a:schemeClr val="accent1"/>
+          </a:lnRef>
+          <a:fillRef idx="3">
+            <a:schemeClr val="accent1"/>
+          </a:fillRef>
+          <a:effectRef idx="2">
+            <a:schemeClr val="accent1"/>
+          </a:effectRef>
+          <a:fontRef idx="minor">
+            <a:schemeClr val="lt1"/>
+          </a:fontRef>
+        </p:style>
+        <p:txBody>
+          <a:bodyPr rtlCol="0" anchor="ctr" wrap="square"/>
+          <a:lstStyle/>
+          <a:p>
+            <a:pPr algn="ctr"/>
+            <a:r>
+              <a:rPr sz="1300" b="1">
+                <a:solidFill>
+                  <a:srgbClr val="FFFFFF"/>
+                </a:solidFill>
+                <a:latin typeface="Arial"/>
+              </a:rPr>
+              <a:t>KCN VN</a:t>
+            </a:r>
+          </a:p>
+        </p:txBody>
+      </p:sp>
+      <p:cxnSp>
+        <p:nvCxnSpPr>
+          <p:cNvPr id="16" name="Connector 15"/>
+          <p:cNvCxnSpPr/>
+          <p:nvPr/>
+        </p:nvCxnSpPr>
+        <p:spPr>
+          <a:xfrm flipV="1">
+            <a:off x="1412748.0" y="3762756.0"/>
+            <a:ext cx="2839212.0" cy="420624.0"/>
+          </a:xfrm>
+          <a:prstGeom prst="line">
+            <a:avLst/>
+          </a:prstGeom>
+          <a:ln w="12700">
+            <a:solidFill>
+              <a:srgbClr val="065F46"/>
+            </a:solidFill>
+          </a:ln>
+        </p:spPr>
+        <p:style>
+          <a:lnRef idx="2">
+            <a:schemeClr val="accent1"/>
+          </a:lnRef>
+          <a:fillRef idx="0">
+            <a:schemeClr val="accent1"/>
+          </a:fillRef>
+          <a:effectRef idx="1">
+            <a:schemeClr val="accent1"/>
+          </a:effectRef>
+          <a:fontRef idx="minor">
+            <a:schemeClr val="tx1"/>
+          </a:fontRef>
+        </p:style>
+      </p:cxnSp>
+      <p:sp>
+        <p:nvSpPr>
+          <p:cNvPr id="17" name="Rounded Rectangle 16"/>
+          <p:cNvSpPr/>
+          <p:nvPr/>
+        </p:nvSpPr>
+        <p:spPr>
+          <a:xfrm>
+            <a:off x="2880360" y="3593592"/>
+            <a:ext cx="2743200" cy="338328"/>
+          </a:xfrm>
+          <a:prstGeom prst="roundRect">
+            <a:avLst/>
+          </a:prstGeom>
+          <a:solidFill>
+            <a:srgbClr val="D1FAE5"/>
+          </a:solidFill>
+          <a:ln>
+            <a:solidFill>
+              <a:srgbClr val="D1FAE5"/>
+            </a:solidFill>
+          </a:ln>
+        </p:spPr>
+        <p:style>
+          <a:lnRef idx="1">
+            <a:schemeClr val="accent1"/>
+          </a:lnRef>
+          <a:fillRef idx="3">
+            <a:schemeClr val="accent1"/>
+          </a:fillRef>
+          <a:effectRef idx="2">
+            <a:schemeClr val="accent1"/>
+          </a:effectRef>
+          <a:fontRef idx="minor">
+            <a:schemeClr val="lt1"/>
+          </a:fontRef>
+        </p:style>
+        <p:txBody>
+          <a:bodyPr rtlCol="0" anchor="ctr" wrap="square"/>
+          <a:lstStyle/>
+          <a:p>
+            <a:pPr algn="l"/>
+            <a:r>
+              <a:rPr sz="1200" b="0">
+                <a:solidFill>
+                  <a:srgbClr val="022C22"/>
+                </a:solidFill>
+                <a:latin typeface="Calibri"/>
+              </a:rPr>
+              <a:t>~400 KCN cả nước</a:t>
+            </a:r>
+          </a:p>
+        </p:txBody>
+      </p:sp>
+      <p:cxnSp>
+        <p:nvCxnSpPr>
+          <p:cNvPr id="18" name="Connector 17"/>
+          <p:cNvCxnSpPr/>
+          <p:nvPr/>
+        </p:nvCxnSpPr>
+        <p:spPr>
+          <a:xfrm>
+            <a:off x="1412748.0" y="4183380.0"/>
+            <a:ext cx="2839212.0" cy="0.0"/>
+          </a:xfrm>
+          <a:prstGeom prst="line">
+            <a:avLst/>
+          </a:prstGeom>
+          <a:ln w="12700">
+            <a:solidFill>
+              <a:srgbClr val="065F46"/>
+            </a:solidFill>
+          </a:ln>
+        </p:spPr>
+        <p:style>
+          <a:lnRef idx="2">
+            <a:schemeClr val="accent1"/>
+          </a:lnRef>
+          <a:fillRef idx="0">
+            <a:schemeClr val="accent1"/>
+          </a:fillRef>
+          <a:effectRef idx="1">
+            <a:schemeClr val="accent1"/>
+          </a:effectRef>
+          <a:fontRef idx="minor">
+            <a:schemeClr val="tx1"/>
+          </a:fontRef>
+        </p:style>
+      </p:cxnSp>
+      <p:sp>
+        <p:nvSpPr>
+          <p:cNvPr id="19" name="Rounded Rectangle 18"/>
+          <p:cNvSpPr/>
+          <p:nvPr/>
+        </p:nvSpPr>
+        <p:spPr>
+          <a:xfrm>
+            <a:off x="2880360" y="4014216"/>
+            <a:ext cx="2743200" cy="338328"/>
+          </a:xfrm>
+          <a:prstGeom prst="roundRect">
+            <a:avLst/>
+          </a:prstGeom>
+          <a:solidFill>
+            <a:srgbClr val="D1FAE5"/>
+          </a:solidFill>
+          <a:ln>
+            <a:solidFill>
+              <a:srgbClr val="D1FAE5"/>
+            </a:solidFill>
+          </a:ln>
+        </p:spPr>
+        <p:style>
+          <a:lnRef idx="1">
+            <a:schemeClr val="accent1"/>
+          </a:lnRef>
+          <a:fillRef idx="3">
+            <a:schemeClr val="accent1"/>
+          </a:fillRef>
+          <a:effectRef idx="2">
+            <a:schemeClr val="accent1"/>
+          </a:effectRef>
+          <a:fontRef idx="minor">
+            <a:schemeClr val="lt1"/>
+          </a:fontRef>
+        </p:style>
+        <p:txBody>
+          <a:bodyPr rtlCol="0" anchor="ctr" wrap="square"/>
+          <a:lstStyle/>
+          <a:p>
+            <a:pPr algn="l"/>
+            <a:r>
+              <a:rPr sz="1200" b="0">
+                <a:solidFill>
+                  <a:srgbClr val="022C22"/>
+                </a:solidFill>
+                <a:latin typeface="Calibri"/>
+              </a:rPr>
+              <a:t>40% KTTĐ phía Nam</a:t>
+            </a:r>
+          </a:p>
+        </p:txBody>
+      </p:sp>
+      <p:cxnSp>
+        <p:nvCxnSpPr>
+          <p:cNvPr id="20" name="Connector 19"/>
+          <p:cNvCxnSpPr/>
+          <p:nvPr/>
+        </p:nvCxnSpPr>
+        <p:spPr>
+          <a:xfrm>
+            <a:off x="1412748.0" y="4183380.0"/>
+            <a:ext cx="2839212.0" cy="420624.0"/>
+          </a:xfrm>
+          <a:prstGeom prst="line">
+            <a:avLst/>
+          </a:prstGeom>
+          <a:ln w="12700">
+            <a:solidFill>
+              <a:srgbClr val="065F46"/>
+            </a:solidFill>
+          </a:ln>
+        </p:spPr>
+        <p:style>
+          <a:lnRef idx="2">
+            <a:schemeClr val="accent1"/>
+          </a:lnRef>
+          <a:fillRef idx="0">
+            <a:schemeClr val="accent1"/>
+          </a:fillRef>
+          <a:effectRef idx="1">
+            <a:schemeClr val="accent1"/>
+          </a:effectRef>
+          <a:fontRef idx="minor">
+            <a:schemeClr val="tx1"/>
+          </a:fontRef>
+        </p:style>
+      </p:cxnSp>
+      <p:sp>
+        <p:nvSpPr>
+          <p:cNvPr id="21" name="Rounded Rectangle 20"/>
+          <p:cNvSpPr/>
+          <p:nvPr/>
+        </p:nvSpPr>
+        <p:spPr>
+          <a:xfrm>
+            <a:off x="2880360" y="4434840"/>
+            <a:ext cx="2743200" cy="338328"/>
+          </a:xfrm>
+          <a:prstGeom prst="roundRect">
+            <a:avLst/>
+          </a:prstGeom>
+          <a:solidFill>
+            <a:srgbClr val="D1FAE5"/>
+          </a:solidFill>
+          <a:ln>
+            <a:solidFill>
+              <a:srgbClr val="D1FAE5"/>
+            </a:solidFill>
+          </a:ln>
+        </p:spPr>
+        <p:style>
+          <a:lnRef idx="1">
+            <a:schemeClr val="accent1"/>
+          </a:lnRef>
+          <a:fillRef idx="3">
+            <a:schemeClr val="accent1"/>
+          </a:fillRef>
+          <a:effectRef idx="2">
+            <a:schemeClr val="accent1"/>
+          </a:effectRef>
+          <a:fontRef idx="minor">
+            <a:schemeClr val="lt1"/>
+          </a:fontRef>
+        </p:style>
+        <p:txBody>
+          <a:bodyPr rtlCol="0" anchor="ctr" wrap="square"/>
+          <a:lstStyle/>
+          <a:p>
+            <a:pPr algn="l"/>
+            <a:r>
+              <a:rPr sz="1200" b="0">
+                <a:solidFill>
+                  <a:srgbClr val="022C22"/>
+                </a:solidFill>
+                <a:latin typeface="Calibri"/>
+              </a:rPr>
+              <a:t>Vùng Bắc Ninh-HN</a:t>
+            </a:r>
+          </a:p>
+        </p:txBody>
+      </p:sp>
+      <p:cxnSp>
+        <p:nvCxnSpPr>
+          <p:cNvPr id="22" name="Connector 21"/>
+          <p:cNvCxnSpPr/>
+          <p:nvPr/>
+        </p:nvCxnSpPr>
+        <p:spPr>
+          <a:xfrm>
+            <a:off x="6094476.0" y="1124712.0"/>
+            <a:ext cx="4681728.0" cy="864108.0"/>
+          </a:xfrm>
+          <a:prstGeom prst="line">
+            <a:avLst/>
+          </a:prstGeom>
+          <a:ln w="22860">
+            <a:solidFill>
+              <a:srgbClr val="B91C1C"/>
+            </a:solidFill>
+          </a:ln>
+        </p:spPr>
+        <p:style>
+          <a:lnRef idx="2">
+            <a:schemeClr val="accent1"/>
+          </a:lnRef>
+          <a:fillRef idx="0">
+            <a:schemeClr val="accent1"/>
+          </a:fillRef>
+          <a:effectRef idx="1">
+            <a:schemeClr val="accent1"/>
+          </a:effectRef>
+          <a:fontRef idx="minor">
+            <a:schemeClr val="tx1"/>
+          </a:fontRef>
+        </p:style>
+      </p:cxnSp>
+      <p:sp>
+        <p:nvSpPr>
+          <p:cNvPr id="23" name="Oval 22"/>
+          <p:cNvSpPr/>
+          <p:nvPr/>
+        </p:nvSpPr>
+        <p:spPr>
+          <a:xfrm>
+            <a:off x="9473184" y="1691640"/>
+            <a:ext cx="2606040" cy="594360"/>
+          </a:xfrm>
+          <a:prstGeom prst="ellipse">
+            <a:avLst/>
+          </a:prstGeom>
+          <a:solidFill>
+            <a:srgbClr val="B91C1C"/>
+          </a:solidFill>
+          <a:ln>
+            <a:solidFill>
+              <a:srgbClr val="B91C1C"/>
+            </a:solidFill>
+          </a:ln>
+        </p:spPr>
+        <p:style>
+          <a:lnRef idx="1">
+            <a:schemeClr val="accent1"/>
+          </a:lnRef>
+          <a:fillRef idx="3">
+            <a:schemeClr val="accent1"/>
+          </a:fillRef>
+          <a:effectRef idx="2">
+            <a:schemeClr val="accent1"/>
+          </a:effectRef>
+          <a:fontRef idx="minor">
+            <a:schemeClr val="lt1"/>
+          </a:fontRef>
+        </p:style>
+        <p:txBody>
+          <a:bodyPr rtlCol="0" anchor="ctr" wrap="square"/>
+          <a:lstStyle/>
+          <a:p>
+            <a:pPr algn="ctr"/>
+            <a:r>
+              <a:rPr sz="1300" b="1">
+                <a:solidFill>
+                  <a:srgbClr val="FFFFFF"/>
+                </a:solidFill>
+                <a:latin typeface="Arial"/>
+              </a:rPr>
+              <a:t>18 KKT ven biển</a:t>
+            </a:r>
+          </a:p>
+        </p:txBody>
+      </p:sp>
+      <p:cxnSp>
+        <p:nvCxnSpPr>
+          <p:cNvPr id="24" name="Connector 23"/>
+          <p:cNvCxnSpPr/>
+          <p:nvPr/>
+        </p:nvCxnSpPr>
+        <p:spPr>
+          <a:xfrm flipH="1" flipV="1">
+            <a:off x="7936992.0" y="1568196.0"/>
+            <a:ext cx="2839212.0" cy="420624.0"/>
+          </a:xfrm>
+          <a:prstGeom prst="line">
+            <a:avLst/>
+          </a:prstGeom>
+          <a:ln w="12700">
+            <a:solidFill>
+              <a:srgbClr val="B91C1C"/>
+            </a:solidFill>
+          </a:ln>
+        </p:spPr>
+        <p:style>
+          <a:lnRef idx="2">
+            <a:schemeClr val="accent1"/>
+          </a:lnRef>
+          <a:fillRef idx="0">
+            <a:schemeClr val="accent1"/>
+          </a:fillRef>
+          <a:effectRef idx="1">
+            <a:schemeClr val="accent1"/>
+          </a:effectRef>
+          <a:fontRef idx="minor">
+            <a:schemeClr val="tx1"/>
+          </a:fontRef>
+        </p:style>
+      </p:cxnSp>
+      <p:sp>
+        <p:nvSpPr>
+          <p:cNvPr id="25" name="Rounded Rectangle 24"/>
+          <p:cNvSpPr/>
+          <p:nvPr/>
+        </p:nvSpPr>
+        <p:spPr>
+          <a:xfrm>
+            <a:off x="6565392" y="1399032"/>
+            <a:ext cx="2743200" cy="338328"/>
+          </a:xfrm>
+          <a:prstGeom prst="roundRect">
+            <a:avLst/>
+          </a:prstGeom>
+          <a:solidFill>
+            <a:srgbClr val="FEE2E2"/>
+          </a:solidFill>
+          <a:ln>
+            <a:solidFill>
+              <a:srgbClr val="FEE2E2"/>
+            </a:solidFill>
+          </a:ln>
+        </p:spPr>
+        <p:style>
+          <a:lnRef idx="1">
+            <a:schemeClr val="accent1"/>
+          </a:lnRef>
+          <a:fillRef idx="3">
+            <a:schemeClr val="accent1"/>
+          </a:fillRef>
+          <a:effectRef idx="2">
+            <a:schemeClr val="accent1"/>
+          </a:effectRef>
+          <a:fontRef idx="minor">
+            <a:schemeClr val="lt1"/>
+          </a:fontRef>
+        </p:style>
+        <p:txBody>
+          <a:bodyPr rtlCol="0" anchor="ctr" wrap="square"/>
+          <a:lstStyle/>
+          <a:p>
+            <a:pPr algn="l"/>
+            <a:r>
+              <a:rPr sz="1200" b="0">
+                <a:solidFill>
+                  <a:srgbClr val="450A0A"/>
+                </a:solidFill>
+                <a:latin typeface="Calibri"/>
+              </a:rPr>
+              <a:t>Đặc quyền kinh tế</a:t>
+            </a:r>
+          </a:p>
+        </p:txBody>
+      </p:sp>
+      <p:cxnSp>
+        <p:nvCxnSpPr>
+          <p:cNvPr id="26" name="Connector 25"/>
+          <p:cNvCxnSpPr/>
+          <p:nvPr/>
+        </p:nvCxnSpPr>
+        <p:spPr>
+          <a:xfrm flipH="1">
+            <a:off x="7936992.0" y="1988820.0"/>
+            <a:ext cx="2839212.0" cy="0.0"/>
+          </a:xfrm>
+          <a:prstGeom prst="line">
+            <a:avLst/>
+          </a:prstGeom>
+          <a:ln w="12700">
+            <a:solidFill>
+              <a:srgbClr val="B91C1C"/>
+            </a:solidFill>
+          </a:ln>
+        </p:spPr>
+        <p:style>
+          <a:lnRef idx="2">
+            <a:schemeClr val="accent1"/>
+          </a:lnRef>
+          <a:fillRef idx="0">
+            <a:schemeClr val="accent1"/>
+          </a:fillRef>
+          <a:effectRef idx="1">
+            <a:schemeClr val="accent1"/>
+          </a:effectRef>
+          <a:fontRef idx="minor">
+            <a:schemeClr val="tx1"/>
+          </a:fontRef>
+        </p:style>
+      </p:cxnSp>
+      <p:sp>
+        <p:nvSpPr>
+          <p:cNvPr id="27" name="Rounded Rectangle 26"/>
+          <p:cNvSpPr/>
+          <p:nvPr/>
+        </p:nvSpPr>
+        <p:spPr>
+          <a:xfrm>
+            <a:off x="6565392" y="1819656"/>
+            <a:ext cx="2743200" cy="338328"/>
+          </a:xfrm>
+          <a:prstGeom prst="roundRect">
+            <a:avLst/>
+          </a:prstGeom>
+          <a:solidFill>
+            <a:srgbClr val="FEE2E2"/>
+          </a:solidFill>
+          <a:ln>
+            <a:solidFill>
+              <a:srgbClr val="FEE2E2"/>
+            </a:solidFill>
+          </a:ln>
+        </p:spPr>
+        <p:style>
+          <a:lnRef idx="1">
+            <a:schemeClr val="accent1"/>
+          </a:lnRef>
+          <a:fillRef idx="3">
+            <a:schemeClr val="accent1"/>
+          </a:fillRef>
+          <a:effectRef idx="2">
+            <a:schemeClr val="accent1"/>
+          </a:effectRef>
+          <a:fontRef idx="minor">
+            <a:schemeClr val="lt1"/>
+          </a:fontRef>
+        </p:style>
+        <p:txBody>
+          <a:bodyPr rtlCol="0" anchor="ctr" wrap="square"/>
+          <a:lstStyle/>
+          <a:p>
+            <a:pPr algn="l"/>
+            <a:r>
+              <a:rPr sz="1200" b="0">
+                <a:solidFill>
+                  <a:srgbClr val="450A0A"/>
+                </a:solidFill>
+                <a:latin typeface="Calibri"/>
+              </a:rPr>
+              <a:t>Đa chức năng</a:t>
+            </a:r>
+          </a:p>
+        </p:txBody>
+      </p:sp>
+      <p:cxnSp>
+        <p:nvCxnSpPr>
+          <p:cNvPr id="28" name="Connector 27"/>
+          <p:cNvCxnSpPr/>
+          <p:nvPr/>
+        </p:nvCxnSpPr>
+        <p:spPr>
+          <a:xfrm flipH="1">
+            <a:off x="7936992.0" y="1988820.0"/>
+            <a:ext cx="2839212.0" cy="420624.0"/>
+          </a:xfrm>
+          <a:prstGeom prst="line">
+            <a:avLst/>
+          </a:prstGeom>
+          <a:ln w="12700">
+            <a:solidFill>
+              <a:srgbClr val="B91C1C"/>
+            </a:solidFill>
+          </a:ln>
+        </p:spPr>
+        <p:style>
+          <a:lnRef idx="2">
+            <a:schemeClr val="accent1"/>
+          </a:lnRef>
+          <a:fillRef idx="0">
+            <a:schemeClr val="accent1"/>
+          </a:fillRef>
+          <a:effectRef idx="1">
+            <a:schemeClr val="accent1"/>
+          </a:effectRef>
+          <a:fontRef idx="minor">
+            <a:schemeClr val="tx1"/>
+          </a:fontRef>
+        </p:style>
+      </p:cxnSp>
+      <p:sp>
+        <p:nvSpPr>
+          <p:cNvPr id="29" name="Rounded Rectangle 28"/>
+          <p:cNvSpPr/>
+          <p:nvPr/>
+        </p:nvSpPr>
+        <p:spPr>
+          <a:xfrm>
+            <a:off x="6565392" y="2240280"/>
+            <a:ext cx="2743200" cy="338328"/>
+          </a:xfrm>
+          <a:prstGeom prst="roundRect">
+            <a:avLst/>
+          </a:prstGeom>
+          <a:solidFill>
+            <a:srgbClr val="FEE2E2"/>
+          </a:solidFill>
+          <a:ln>
+            <a:solidFill>
+              <a:srgbClr val="FEE2E2"/>
+            </a:solidFill>
+          </a:ln>
+        </p:spPr>
+        <p:style>
+          <a:lnRef idx="1">
+            <a:schemeClr val="accent1"/>
+          </a:lnRef>
+          <a:fillRef idx="3">
+            <a:schemeClr val="accent1"/>
+          </a:fillRef>
+          <a:effectRef idx="2">
+            <a:schemeClr val="accent1"/>
+          </a:effectRef>
+          <a:fontRef idx="minor">
+            <a:schemeClr val="lt1"/>
+          </a:fontRef>
+        </p:style>
+        <p:txBody>
+          <a:bodyPr rtlCol="0" anchor="ctr" wrap="square"/>
+          <a:lstStyle/>
+          <a:p>
+            <a:pPr algn="l"/>
+            <a:r>
+              <a:rPr sz="1200" b="0">
+                <a:solidFill>
+                  <a:srgbClr val="450A0A"/>
+                </a:solidFill>
+                <a:latin typeface="Calibri"/>
+              </a:rPr>
+              <a:t>Kết nối cảng biển</a:t>
+            </a:r>
+          </a:p>
+        </p:txBody>
+      </p:sp>
+      <p:cxnSp>
+        <p:nvCxnSpPr>
+          <p:cNvPr id="30" name="Connector 29"/>
+          <p:cNvCxnSpPr/>
+          <p:nvPr/>
+        </p:nvCxnSpPr>
+        <p:spPr>
+          <a:xfrm>
+            <a:off x="6094476.0" y="1124712.0"/>
+            <a:ext cx="4681728.0" cy="3058668.0"/>
+          </a:xfrm>
+          <a:prstGeom prst="line">
+            <a:avLst/>
+          </a:prstGeom>
+          <a:ln w="22860">
+            <a:solidFill>
+              <a:srgbClr val="B45309"/>
+            </a:solidFill>
+          </a:ln>
+        </p:spPr>
+        <p:style>
+          <a:lnRef idx="2">
+            <a:schemeClr val="accent1"/>
+          </a:lnRef>
+          <a:fillRef idx="0">
+            <a:schemeClr val="accent1"/>
+          </a:fillRef>
+          <a:effectRef idx="1">
+            <a:schemeClr val="accent1"/>
+          </a:effectRef>
+          <a:fontRef idx="minor">
+            <a:schemeClr val="tx1"/>
+          </a:fontRef>
+        </p:style>
+      </p:cxnSp>
+      <p:sp>
+        <p:nvSpPr>
+          <p:cNvPr id="31" name="Oval 30"/>
+          <p:cNvSpPr/>
+          <p:nvPr/>
+        </p:nvSpPr>
+        <p:spPr>
+          <a:xfrm>
+            <a:off x="9473184" y="3886200"/>
+            <a:ext cx="2606040" cy="594360"/>
+          </a:xfrm>
+          <a:prstGeom prst="ellipse">
+            <a:avLst/>
+          </a:prstGeom>
+          <a:solidFill>
+            <a:srgbClr val="B45309"/>
+          </a:solidFill>
+          <a:ln>
+            <a:solidFill>
+              <a:srgbClr val="B45309"/>
+            </a:solidFill>
+          </a:ln>
+        </p:spPr>
+        <p:style>
+          <a:lnRef idx="1">
+            <a:schemeClr val="accent1"/>
+          </a:lnRef>
+          <a:fillRef idx="3">
+            <a:schemeClr val="accent1"/>
+          </a:fillRef>
+          <a:effectRef idx="2">
+            <a:schemeClr val="accent1"/>
+          </a:effectRef>
+          <a:fontRef idx="minor">
+            <a:schemeClr val="lt1"/>
+          </a:fontRef>
+        </p:style>
+        <p:txBody>
+          <a:bodyPr rtlCol="0" anchor="ctr" wrap="square"/>
+          <a:lstStyle/>
+          <a:p>
+            <a:pPr algn="ctr"/>
+            <a:r>
+              <a:rPr sz="1300" b="1">
+                <a:solidFill>
+                  <a:srgbClr val="FFFFFF"/>
+                </a:solidFill>
+                <a:latin typeface="Arial"/>
+              </a:rPr>
+              <a:t>KKT Nhơn Hội</a:t>
+            </a:r>
+          </a:p>
+        </p:txBody>
+      </p:sp>
+      <p:cxnSp>
+        <p:nvCxnSpPr>
+          <p:cNvPr id="32" name="Connector 31"/>
+          <p:cNvCxnSpPr/>
+          <p:nvPr/>
+        </p:nvCxnSpPr>
+        <p:spPr>
+          <a:xfrm flipH="1" flipV="1">
+            <a:off x="7936992.0" y="3762756.0"/>
+            <a:ext cx="2839212.0" cy="420624.0"/>
+          </a:xfrm>
+          <a:prstGeom prst="line">
+            <a:avLst/>
+          </a:prstGeom>
+          <a:ln w="12700">
+            <a:solidFill>
+              <a:srgbClr val="B45309"/>
+            </a:solidFill>
+          </a:ln>
+        </p:spPr>
+        <p:style>
+          <a:lnRef idx="2">
+            <a:schemeClr val="accent1"/>
+          </a:lnRef>
+          <a:fillRef idx="0">
+            <a:schemeClr val="accent1"/>
+          </a:fillRef>
+          <a:effectRef idx="1">
+            <a:schemeClr val="accent1"/>
+          </a:effectRef>
+          <a:fontRef idx="minor">
+            <a:schemeClr val="tx1"/>
+          </a:fontRef>
+        </p:style>
+      </p:cxnSp>
+      <p:sp>
+        <p:nvSpPr>
+          <p:cNvPr id="33" name="Rounded Rectangle 32"/>
+          <p:cNvSpPr/>
+          <p:nvPr/>
+        </p:nvSpPr>
+        <p:spPr>
+          <a:xfrm>
+            <a:off x="6565392" y="3593592"/>
+            <a:ext cx="2743200" cy="338328"/>
+          </a:xfrm>
+          <a:prstGeom prst="roundRect">
+            <a:avLst/>
+          </a:prstGeom>
+          <a:solidFill>
+            <a:srgbClr val="FEF3C7"/>
+          </a:solidFill>
+          <a:ln>
+            <a:solidFill>
+              <a:srgbClr val="FEF3C7"/>
+            </a:solidFill>
+          </a:ln>
+        </p:spPr>
+        <p:style>
+          <a:lnRef idx="1">
+            <a:schemeClr val="accent1"/>
+          </a:lnRef>
+          <a:fillRef idx="3">
+            <a:schemeClr val="accent1"/>
+          </a:fillRef>
+          <a:effectRef idx="2">
+            <a:schemeClr val="accent1"/>
+          </a:effectRef>
+          <a:fontRef idx="minor">
+            <a:schemeClr val="lt1"/>
+          </a:fontRef>
+        </p:style>
+        <p:txBody>
+          <a:bodyPr rtlCol="0" anchor="ctr" wrap="square"/>
+          <a:lstStyle/>
+          <a:p>
+            <a:pPr algn="l"/>
+            <a:r>
+              <a:rPr sz="1200" b="0">
+                <a:solidFill>
+                  <a:srgbClr val="451A03"/>
+                </a:solidFill>
+                <a:latin typeface="Calibri"/>
+              </a:rPr>
+              <a:t>11 700 ha</a:t>
+            </a:r>
+          </a:p>
+        </p:txBody>
+      </p:sp>
+      <p:cxnSp>
+        <p:nvCxnSpPr>
+          <p:cNvPr id="34" name="Connector 33"/>
+          <p:cNvCxnSpPr/>
+          <p:nvPr/>
+        </p:nvCxnSpPr>
+        <p:spPr>
+          <a:xfrm flipH="1">
+            <a:off x="7936992.0" y="4183380.0"/>
+            <a:ext cx="2839212.0" cy="0.0"/>
+          </a:xfrm>
+          <a:prstGeom prst="line">
+            <a:avLst/>
+          </a:prstGeom>
+          <a:ln w="12700">
+            <a:solidFill>
+              <a:srgbClr val="B45309"/>
+            </a:solidFill>
+          </a:ln>
+        </p:spPr>
+        <p:style>
+          <a:lnRef idx="2">
+            <a:schemeClr val="accent1"/>
+          </a:lnRef>
+          <a:fillRef idx="0">
+            <a:schemeClr val="accent1"/>
+          </a:fillRef>
+          <a:effectRef idx="1">
+            <a:schemeClr val="accent1"/>
+          </a:effectRef>
+          <a:fontRef idx="minor">
+            <a:schemeClr val="tx1"/>
+          </a:fontRef>
+        </p:style>
+      </p:cxnSp>
+      <p:sp>
+        <p:nvSpPr>
+          <p:cNvPr id="35" name="Rounded Rectangle 34"/>
+          <p:cNvSpPr/>
+          <p:nvPr/>
+        </p:nvSpPr>
+        <p:spPr>
+          <a:xfrm>
+            <a:off x="6565392" y="4014216"/>
+            <a:ext cx="2743200" cy="338328"/>
+          </a:xfrm>
+          <a:prstGeom prst="roundRect">
+            <a:avLst/>
+          </a:prstGeom>
+          <a:solidFill>
+            <a:srgbClr val="FEF3C7"/>
+          </a:solidFill>
+          <a:ln>
+            <a:solidFill>
+              <a:srgbClr val="FEF3C7"/>
+            </a:solidFill>
+          </a:ln>
+        </p:spPr>
+        <p:style>
+          <a:lnRef idx="1">
+            <a:schemeClr val="accent1"/>
+          </a:lnRef>
+          <a:fillRef idx="3">
+            <a:schemeClr val="accent1"/>
+          </a:fillRef>
+          <a:effectRef idx="2">
+            <a:schemeClr val="accent1"/>
+          </a:effectRef>
+          <a:fontRef idx="minor">
+            <a:schemeClr val="lt1"/>
+          </a:fontRef>
+        </p:style>
+        <p:txBody>
+          <a:bodyPr rtlCol="0" anchor="ctr" wrap="square"/>
+          <a:lstStyle/>
+          <a:p>
+            <a:pPr algn="l"/>
+            <a:r>
+              <a:rPr sz="1200" b="0">
+                <a:solidFill>
+                  <a:srgbClr val="451A03"/>
+                </a:solidFill>
+                <a:latin typeface="Calibri"/>
+              </a:rPr>
+              <a:t>Cảng QN nước sâu</a:t>
+            </a:r>
+          </a:p>
+        </p:txBody>
+      </p:sp>
+      <p:cxnSp>
+        <p:nvCxnSpPr>
+          <p:cNvPr id="36" name="Connector 35"/>
+          <p:cNvCxnSpPr/>
+          <p:nvPr/>
+        </p:nvCxnSpPr>
+        <p:spPr>
+          <a:xfrm flipH="1">
+            <a:off x="7936992.0" y="4183380.0"/>
+            <a:ext cx="2839212.0" cy="420624.0"/>
+          </a:xfrm>
+          <a:prstGeom prst="line">
+            <a:avLst/>
+          </a:prstGeom>
+          <a:ln w="12700">
+            <a:solidFill>
+              <a:srgbClr val="B45309"/>
+            </a:solidFill>
+          </a:ln>
+        </p:spPr>
+        <p:style>
+          <a:lnRef idx="2">
+            <a:schemeClr val="accent1"/>
+          </a:lnRef>
+          <a:fillRef idx="0">
+            <a:schemeClr val="accent1"/>
+          </a:fillRef>
+          <a:effectRef idx="1">
+            <a:schemeClr val="accent1"/>
+          </a:effectRef>
+          <a:fontRef idx="minor">
+            <a:schemeClr val="tx1"/>
+          </a:fontRef>
+        </p:style>
+      </p:cxnSp>
+      <p:sp>
+        <p:nvSpPr>
+          <p:cNvPr id="37" name="Rounded Rectangle 36"/>
+          <p:cNvSpPr/>
+          <p:nvPr/>
+        </p:nvSpPr>
+        <p:spPr>
+          <a:xfrm>
+            <a:off x="6565392" y="4434840"/>
+            <a:ext cx="2743200" cy="338328"/>
+          </a:xfrm>
+          <a:prstGeom prst="roundRect">
+            <a:avLst/>
+          </a:prstGeom>
+          <a:solidFill>
+            <a:srgbClr val="FEF3C7"/>
+          </a:solidFill>
+          <a:ln>
+            <a:solidFill>
+              <a:srgbClr val="FEF3C7"/>
+            </a:solidFill>
+          </a:ln>
+        </p:spPr>
+        <p:style>
+          <a:lnRef idx="1">
+            <a:schemeClr val="accent1"/>
+          </a:lnRef>
+          <a:fillRef idx="3">
+            <a:schemeClr val="accent1"/>
+          </a:fillRef>
+          <a:effectRef idx="2">
+            <a:schemeClr val="accent1"/>
+          </a:effectRef>
+          <a:fontRef idx="minor">
+            <a:schemeClr val="lt1"/>
+          </a:fontRef>
+        </p:style>
+        <p:txBody>
+          <a:bodyPr rtlCol="0" anchor="ctr" wrap="square"/>
+          <a:lstStyle/>
+          <a:p>
+            <a:pPr algn="l"/>
+            <a:r>
+              <a:rPr sz="1200" b="0">
+                <a:solidFill>
+                  <a:srgbClr val="451A03"/>
+                </a:solidFill>
+                <a:latin typeface="Calibri"/>
+              </a:rPr>
+              <a:t>Hành lang ĐT Đông-Tây</a:t>
             </a:r>
           </a:p>
         </p:txBody>
@@ -4028,13 +5346,13 @@
         <p:spPr>
           <a:xfrm>
             <a:off x="274320" y="182880"/>
-            <a:ext cx="2286000" cy="502920"/>
+            <a:ext cx="2011680" cy="502920"/>
           </a:xfrm>
           <a:prstGeom prst="rect">
             <a:avLst/>
           </a:prstGeom>
           <a:solidFill>
-            <a:srgbClr val="991B1B"/>
+            <a:srgbClr val="1E40AF"/>
           </a:solidFill>
           <a:ln>
             <a:noFill/>
@@ -4071,7 +5389,7 @@
         <p:spPr>
           <a:xfrm>
             <a:off x="274320" y="182880"/>
-            <a:ext cx="2286000" cy="502920"/>
+            <a:ext cx="2011680" cy="502920"/>
           </a:xfrm>
           <a:prstGeom prst="rect">
             <a:avLst/>
@@ -4092,7 +5410,7 @@
                 </a:solidFill>
                 <a:latin typeface="Arial"/>
               </a:rPr>
-              <a:t>LỜI GIẢI – NỘI DUNG 1</a:t>
+              <a:t>ĐỀ BÀI – NỘI DUNG 1</a:t>
             </a:r>
           </a:p>
         </p:txBody>
@@ -4121,13 +5439,13 @@
           <a:p>
             <a:pPr algn="l"/>
             <a:r>
-              <a:rPr sz="2400" b="1">
+              <a:rPr sz="2600" b="1">
                 <a:solidFill>
-                  <a:srgbClr val="991B1B"/>
+                  <a:srgbClr val="1E40AF"/>
                 </a:solidFill>
                 <a:latin typeface="Arial"/>
               </a:rPr>
-              <a:t>Hình thức tổ chức lãnh thổ CN</a:t>
+              <a:t>Hình thức tổ chức CN</a:t>
             </a:r>
           </a:p>
         </p:txBody>
@@ -4147,7 +5465,7 @@
             <a:avLst/>
           </a:prstGeom>
           <a:solidFill>
-            <a:srgbClr val="991B1B"/>
+            <a:srgbClr val="1E40AF"/>
           </a:solidFill>
           <a:ln>
             <a:noFill/>
@@ -4184,7 +5502,7 @@
         <p:spPr>
           <a:xfrm>
             <a:off x="274320" y="1508760"/>
-            <a:ext cx="11640312" cy="3474720"/>
+            <a:ext cx="11640312" cy="3840480"/>
           </a:xfrm>
           <a:prstGeom prst="rect">
             <a:avLst/>
@@ -4199,18 +5517,16 @@
           <a:p>
             <a:pPr algn="l"/>
             <a:r>
-              <a:rPr sz="2100" b="0">
+              <a:rPr sz="2200" b="0">
                 <a:solidFill>
                   <a:srgbClr val="1E293B"/>
                 </a:solidFill>
                 <a:latin typeface="Calibri"/>
               </a:rPr>
-              <a:t>Từ đơn giản → phức tạp:
-1. Điểm CN: cơ sở SX đơn lẻ ở vùng nông thôn
-2. Khu CN (KCN): tập trung nhiều xí nghiệp, có hạ tầng chung
-3. Trung tâm CN: tập hợp KCN + DV liên quan
-4. Vùng CN: không gian rộng, nhiều trung tâm
-KKT ven biển: đa chức năng (CN + DV + đô thị + cảng)</a:t>
+              <a:t>Điểm CN → KCN → Trung tâm CN → Vùng CN → KKT ven biển
+KKT: đa chức năng (CN + DV + đô thị + cảng)
+Cả nước: ~400 KCN (2023)
+40% KCN ở vùng KTTĐ phía Nam</a:t>
             </a:r>
           </a:p>
         </p:txBody>
@@ -4223,14 +5539,14 @@
         </p:nvSpPr>
         <p:spPr>
           <a:xfrm>
-            <a:off x="274320" y="5120640"/>
-            <a:ext cx="11640312" cy="914400"/>
+            <a:off x="274320" y="5760720"/>
+            <a:ext cx="11640312" cy="685800"/>
           </a:xfrm>
           <a:prstGeom prst="rect">
             <a:avLst/>
           </a:prstGeom>
           <a:solidFill>
-            <a:srgbClr val="FEF2F2"/>
+            <a:srgbClr val="E0F2FE"/>
           </a:solidFill>
           <a:ln>
             <a:noFill/>
@@ -4266,8 +5582,8 @@
         </p:nvSpPr>
         <p:spPr>
           <a:xfrm>
-            <a:off x="365760" y="5166360"/>
-            <a:ext cx="11457432" cy="822960"/>
+            <a:off x="365760" y="5806440"/>
+            <a:ext cx="11457432" cy="594360"/>
           </a:xfrm>
           <a:prstGeom prst="rect">
             <a:avLst/>
@@ -4282,13 +5598,13 @@
           <a:p>
             <a:pPr algn="l"/>
             <a:r>
-              <a:rPr sz="2200" b="1">
+              <a:rPr sz="1800" b="0">
                 <a:solidFill>
-                  <a:srgbClr val="991B1B"/>
+                  <a:srgbClr val="1E40AF"/>
                 </a:solidFill>
-                <a:latin typeface="Arial"/>
+                <a:latin typeface="Calibri"/>
               </a:rPr>
-              <a:t>✦ Bình Định: KKT Nhơn Hội là hình thức tổ chức CN cao nhất</a:t>
+              <a:t>💡 Suy nghĩ và thảo luận nhóm.</a:t>
             </a:r>
           </a:p>
         </p:txBody>
@@ -4328,13 +5644,13 @@
         <p:spPr>
           <a:xfrm>
             <a:off x="274320" y="182880"/>
-            <a:ext cx="2011680" cy="502920"/>
+            <a:ext cx="2286000" cy="502920"/>
           </a:xfrm>
           <a:prstGeom prst="rect">
             <a:avLst/>
           </a:prstGeom>
           <a:solidFill>
-            <a:srgbClr val="1E40AF"/>
+            <a:srgbClr val="991B1B"/>
           </a:solidFill>
           <a:ln>
             <a:noFill/>
@@ -4371,7 +5687,7 @@
         <p:spPr>
           <a:xfrm>
             <a:off x="274320" y="182880"/>
-            <a:ext cx="2011680" cy="502920"/>
+            <a:ext cx="2286000" cy="502920"/>
           </a:xfrm>
           <a:prstGeom prst="rect">
             <a:avLst/>
@@ -4392,7 +5708,7 @@
                 </a:solidFill>
                 <a:latin typeface="Arial"/>
               </a:rPr>
-              <a:t>ĐỀ BÀI – NỘI DUNG 2</a:t>
+              <a:t>LỜI GIẢI – NỘI DUNG 1</a:t>
             </a:r>
           </a:p>
         </p:txBody>
@@ -4421,13 +5737,13 @@
           <a:p>
             <a:pPr algn="l"/>
             <a:r>
-              <a:rPr sz="2600" b="1">
+              <a:rPr sz="2400" b="1">
                 <a:solidFill>
-                  <a:srgbClr val="1E40AF"/>
+                  <a:srgbClr val="991B1B"/>
                 </a:solidFill>
                 <a:latin typeface="Arial"/>
               </a:rPr>
-              <a:t>Phân bố KCN và KKT</a:t>
+              <a:t>Hình thức tổ chức CN</a:t>
             </a:r>
           </a:p>
         </p:txBody>
@@ -4447,7 +5763,7 @@
             <a:avLst/>
           </a:prstGeom>
           <a:solidFill>
-            <a:srgbClr val="1E40AF"/>
+            <a:srgbClr val="991B1B"/>
           </a:solidFill>
           <a:ln>
             <a:noFill/>
@@ -4484,7 +5800,7 @@
         <p:spPr>
           <a:xfrm>
             <a:off x="274320" y="1508760"/>
-            <a:ext cx="11640312" cy="3840480"/>
+            <a:ext cx="11640312" cy="3474720"/>
           </a:xfrm>
           <a:prstGeom prst="rect">
             <a:avLst/>
@@ -4499,21 +5815,16 @@
           <a:p>
             <a:pPr algn="l"/>
             <a:r>
-              <a:rPr sz="2200" b="0">
+              <a:rPr sz="2100" b="0">
                 <a:solidFill>
                   <a:srgbClr val="1E293B"/>
                 </a:solidFill>
                 <a:latin typeface="Calibri"/>
               </a:rPr>
-              <a:t>Cả nước: ~400 KCN (2023), tập trung:
-• Vùng KTTĐ phía Nam: 40% KCN
-• Vùng KTTĐ phía Bắc: 25% KCN
-18 KKT ven biển:
-Bình Định – KKT Nhơn Hội:
-• Diện tích ~11 700 ha
-• Cảng nước sâu Quy Nhơn
-• FDI: thép, xi măng, sản xuất
-• Logistics + cao tốc B–N</a:t>
+              <a:t>Điểm CN → KCN → Trung tâm CN → Vùng CN → KKT ven biển
+KKT: đa chức năng (CN + DV + đô thị + cảng)
+Cả nước: ~400 KCN (2023)
+40% KCN ở vùng KTTĐ phía Nam</a:t>
             </a:r>
           </a:p>
         </p:txBody>
@@ -4526,14 +5837,14 @@
         </p:nvSpPr>
         <p:spPr>
           <a:xfrm>
-            <a:off x="274320" y="5760720"/>
-            <a:ext cx="11640312" cy="685800"/>
+            <a:off x="274320" y="5120640"/>
+            <a:ext cx="11640312" cy="914400"/>
           </a:xfrm>
           <a:prstGeom prst="rect">
             <a:avLst/>
           </a:prstGeom>
           <a:solidFill>
-            <a:srgbClr val="E0F2FE"/>
+            <a:srgbClr val="FEF2F2"/>
           </a:solidFill>
           <a:ln>
             <a:noFill/>
@@ -4569,8 +5880,8 @@
         </p:nvSpPr>
         <p:spPr>
           <a:xfrm>
-            <a:off x="365760" y="5806440"/>
-            <a:ext cx="11457432" cy="594360"/>
+            <a:off x="365760" y="5166360"/>
+            <a:ext cx="11457432" cy="822960"/>
           </a:xfrm>
           <a:prstGeom prst="rect">
             <a:avLst/>
@@ -4585,13 +5896,13 @@
           <a:p>
             <a:pPr algn="l"/>
             <a:r>
-              <a:rPr sz="1800" b="0">
+              <a:rPr sz="2200" b="1">
                 <a:solidFill>
-                  <a:srgbClr val="1E40AF"/>
+                  <a:srgbClr val="991B1B"/>
                 </a:solidFill>
-                <a:latin typeface="Calibri"/>
+                <a:latin typeface="Arial"/>
               </a:rPr>
-              <a:t>💡 Suy nghĩ và thảo luận nhóm.</a:t>
+              <a:t>✦ Bình Định: KKT Nhơn Hội ~11 700 ha</a:t>
             </a:r>
           </a:p>
         </p:txBody>
@@ -4631,13 +5942,13 @@
         <p:spPr>
           <a:xfrm>
             <a:off x="274320" y="182880"/>
-            <a:ext cx="2286000" cy="502920"/>
+            <a:ext cx="2011680" cy="502920"/>
           </a:xfrm>
           <a:prstGeom prst="rect">
             <a:avLst/>
           </a:prstGeom>
           <a:solidFill>
-            <a:srgbClr val="991B1B"/>
+            <a:srgbClr val="1E40AF"/>
           </a:solidFill>
           <a:ln>
             <a:noFill/>
@@ -4674,7 +5985,7 @@
         <p:spPr>
           <a:xfrm>
             <a:off x="274320" y="182880"/>
-            <a:ext cx="2286000" cy="502920"/>
+            <a:ext cx="2011680" cy="502920"/>
           </a:xfrm>
           <a:prstGeom prst="rect">
             <a:avLst/>
@@ -4695,7 +6006,7 @@
                 </a:solidFill>
                 <a:latin typeface="Arial"/>
               </a:rPr>
-              <a:t>LỜI GIẢI – NỘI DUNG 2</a:t>
+              <a:t>ĐỀ BÀI – NỘI DUNG 2</a:t>
             </a:r>
           </a:p>
         </p:txBody>
@@ -4724,13 +6035,13 @@
           <a:p>
             <a:pPr algn="l"/>
             <a:r>
-              <a:rPr sz="2400" b="1">
+              <a:rPr sz="2600" b="1">
                 <a:solidFill>
-                  <a:srgbClr val="991B1B"/>
+                  <a:srgbClr val="1E40AF"/>
                 </a:solidFill>
                 <a:latin typeface="Arial"/>
               </a:rPr>
-              <a:t>Phân bố KCN và KKT</a:t>
+              <a:t>KKT Nhơn Hội – Bình Định</a:t>
             </a:r>
           </a:p>
         </p:txBody>
@@ -4750,7 +6061,7 @@
             <a:avLst/>
           </a:prstGeom>
           <a:solidFill>
-            <a:srgbClr val="991B1B"/>
+            <a:srgbClr val="1E40AF"/>
           </a:solidFill>
           <a:ln>
             <a:noFill/>
@@ -4787,7 +6098,7 @@
         <p:spPr>
           <a:xfrm>
             <a:off x="274320" y="1508760"/>
-            <a:ext cx="11640312" cy="3474720"/>
+            <a:ext cx="11640312" cy="3840480"/>
           </a:xfrm>
           <a:prstGeom prst="rect">
             <a:avLst/>
@@ -4802,21 +6113,16 @@
           <a:p>
             <a:pPr algn="l"/>
             <a:r>
-              <a:rPr sz="2100" b="0">
+              <a:rPr sz="2200" b="0">
                 <a:solidFill>
                   <a:srgbClr val="1E293B"/>
                 </a:solidFill>
                 <a:latin typeface="Calibri"/>
               </a:rPr>
-              <a:t>Cả nước: ~400 KCN (2023), tập trung:
-• Vùng KTTĐ phía Nam: 40% KCN
-• Vùng KTTĐ phía Bắc: 25% KCN
-18 KKT ven biển:
-Bình Định – KKT Nhơn Hội:
-• Diện tích ~11 700 ha
-• Cảng nước sâu Quy Nhơn
-• FDI: thép, xi măng, sản xuất
-• Logistics + cao tốc B–N</a:t>
+              <a:t>Diện tích ~11 700 ha; cảng nước sâu QN
+FDI: thép, xi măng, SX đa ngành
+Logistics + cao tốc B-N
+Hành lang KT Đông-Tây: Quy Nhơn–TN–Lào</a:t>
             </a:r>
           </a:p>
         </p:txBody>
@@ -4829,14 +6135,14 @@
         </p:nvSpPr>
         <p:spPr>
           <a:xfrm>
-            <a:off x="274320" y="5120640"/>
-            <a:ext cx="11640312" cy="914400"/>
+            <a:off x="274320" y="5760720"/>
+            <a:ext cx="11640312" cy="685800"/>
           </a:xfrm>
           <a:prstGeom prst="rect">
             <a:avLst/>
           </a:prstGeom>
           <a:solidFill>
-            <a:srgbClr val="FEF2F2"/>
+            <a:srgbClr val="E0F2FE"/>
           </a:solidFill>
           <a:ln>
             <a:noFill/>
@@ -4872,8 +6178,8 @@
         </p:nvSpPr>
         <p:spPr>
           <a:xfrm>
-            <a:off x="365760" y="5166360"/>
-            <a:ext cx="11457432" cy="822960"/>
+            <a:off x="365760" y="5806440"/>
+            <a:ext cx="11457432" cy="594360"/>
           </a:xfrm>
           <a:prstGeom prst="rect">
             <a:avLst/>
@@ -4888,13 +6194,13 @@
           <a:p>
             <a:pPr algn="l"/>
             <a:r>
-              <a:rPr sz="2200" b="1">
+              <a:rPr sz="1800" b="0">
                 <a:solidFill>
-                  <a:srgbClr val="991B1B"/>
+                  <a:srgbClr val="1E40AF"/>
                 </a:solidFill>
-                <a:latin typeface="Arial"/>
+                <a:latin typeface="Calibri"/>
               </a:rPr>
-              <a:t>✦ Hành lang kinh tế Đông–Tây qua Quy Nhơn kết nối Tây Nguyên–Lào</a:t>
+              <a:t>💡 Suy nghĩ và thảo luận nhóm.</a:t>
             </a:r>
           </a:p>
         </p:txBody>
@@ -4908,6 +6214,304 @@
 </file>
 
 <file path=ppt/slides/slide7.xml><?xml version="1.0" encoding="utf-8"?>
+<p:sld xmlns:a="http://schemas.openxmlformats.org/drawingml/2006/main" xmlns:p="http://schemas.openxmlformats.org/presentationml/2006/main" xmlns:r="http://schemas.openxmlformats.org/officeDocument/2006/relationships">
+  <p:cSld>
+    <p:bg>
+      <p:bgPr>
+        <a:solidFill>
+          <a:srgbClr val="FFFFFF"/>
+        </a:solidFill>
+        <a:effectLst/>
+      </p:bgPr>
+    </p:bg>
+    <p:spTree>
+      <p:nvGrpSpPr>
+        <p:cNvPr id="1" name=""/>
+        <p:cNvGrpSpPr/>
+        <p:nvPr/>
+      </p:nvGrpSpPr>
+      <p:grpSpPr/>
+      <p:sp>
+        <p:nvSpPr>
+          <p:cNvPr id="2" name="Rectangle 1"/>
+          <p:cNvSpPr/>
+          <p:nvPr/>
+        </p:nvSpPr>
+        <p:spPr>
+          <a:xfrm>
+            <a:off x="274320" y="182880"/>
+            <a:ext cx="2286000" cy="502920"/>
+          </a:xfrm>
+          <a:prstGeom prst="rect">
+            <a:avLst/>
+          </a:prstGeom>
+          <a:solidFill>
+            <a:srgbClr val="991B1B"/>
+          </a:solidFill>
+          <a:ln>
+            <a:noFill/>
+          </a:ln>
+        </p:spPr>
+        <p:style>
+          <a:lnRef idx="1">
+            <a:schemeClr val="accent1"/>
+          </a:lnRef>
+          <a:fillRef idx="3">
+            <a:schemeClr val="accent1"/>
+          </a:fillRef>
+          <a:effectRef idx="2">
+            <a:schemeClr val="accent1"/>
+          </a:effectRef>
+          <a:fontRef idx="minor">
+            <a:schemeClr val="lt1"/>
+          </a:fontRef>
+        </p:style>
+        <p:txBody>
+          <a:bodyPr rtlCol="0" anchor="ctr"/>
+          <a:lstStyle/>
+          <a:p>
+            <a:pPr algn="ctr"/>
+          </a:p>
+        </p:txBody>
+      </p:sp>
+      <p:sp>
+        <p:nvSpPr>
+          <p:cNvPr id="3" name="TextBox 2"/>
+          <p:cNvSpPr txBox="1"/>
+          <p:nvPr/>
+        </p:nvSpPr>
+        <p:spPr>
+          <a:xfrm>
+            <a:off x="274320" y="182880"/>
+            <a:ext cx="2286000" cy="502920"/>
+          </a:xfrm>
+          <a:prstGeom prst="rect">
+            <a:avLst/>
+          </a:prstGeom>
+          <a:noFill/>
+        </p:spPr>
+        <p:txBody>
+          <a:bodyPr wrap="square">
+            <a:spAutoFit/>
+          </a:bodyPr>
+          <a:lstStyle/>
+          <a:p>
+            <a:pPr algn="ctr"/>
+            <a:r>
+              <a:rPr sz="1600" b="1">
+                <a:solidFill>
+                  <a:srgbClr val="FFFFFF"/>
+                </a:solidFill>
+                <a:latin typeface="Arial"/>
+              </a:rPr>
+              <a:t>LỜI GIẢI – NỘI DUNG 2</a:t>
+            </a:r>
+          </a:p>
+        </p:txBody>
+      </p:sp>
+      <p:sp>
+        <p:nvSpPr>
+          <p:cNvPr id="4" name="TextBox 3"/>
+          <p:cNvSpPr txBox="1"/>
+          <p:nvPr/>
+        </p:nvSpPr>
+        <p:spPr>
+          <a:xfrm>
+            <a:off x="274320" y="777240"/>
+            <a:ext cx="11640312" cy="594360"/>
+          </a:xfrm>
+          <a:prstGeom prst="rect">
+            <a:avLst/>
+          </a:prstGeom>
+          <a:noFill/>
+        </p:spPr>
+        <p:txBody>
+          <a:bodyPr wrap="square">
+            <a:spAutoFit/>
+          </a:bodyPr>
+          <a:lstStyle/>
+          <a:p>
+            <a:pPr algn="l"/>
+            <a:r>
+              <a:rPr sz="2400" b="1">
+                <a:solidFill>
+                  <a:srgbClr val="991B1B"/>
+                </a:solidFill>
+                <a:latin typeface="Arial"/>
+              </a:rPr>
+              <a:t>KKT Nhơn Hội – Bình Định</a:t>
+            </a:r>
+          </a:p>
+        </p:txBody>
+      </p:sp>
+      <p:sp>
+        <p:nvSpPr>
+          <p:cNvPr id="5" name="Rectangle 4"/>
+          <p:cNvSpPr/>
+          <p:nvPr/>
+        </p:nvSpPr>
+        <p:spPr>
+          <a:xfrm>
+            <a:off x="274320" y="1417320"/>
+            <a:ext cx="11640312" cy="36576"/>
+          </a:xfrm>
+          <a:prstGeom prst="rect">
+            <a:avLst/>
+          </a:prstGeom>
+          <a:solidFill>
+            <a:srgbClr val="991B1B"/>
+          </a:solidFill>
+          <a:ln>
+            <a:noFill/>
+          </a:ln>
+        </p:spPr>
+        <p:style>
+          <a:lnRef idx="1">
+            <a:schemeClr val="accent1"/>
+          </a:lnRef>
+          <a:fillRef idx="3">
+            <a:schemeClr val="accent1"/>
+          </a:fillRef>
+          <a:effectRef idx="2">
+            <a:schemeClr val="accent1"/>
+          </a:effectRef>
+          <a:fontRef idx="minor">
+            <a:schemeClr val="lt1"/>
+          </a:fontRef>
+        </p:style>
+        <p:txBody>
+          <a:bodyPr rtlCol="0" anchor="ctr"/>
+          <a:lstStyle/>
+          <a:p>
+            <a:pPr algn="ctr"/>
+          </a:p>
+        </p:txBody>
+      </p:sp>
+      <p:sp>
+        <p:nvSpPr>
+          <p:cNvPr id="6" name="TextBox 5"/>
+          <p:cNvSpPr txBox="1"/>
+          <p:nvPr/>
+        </p:nvSpPr>
+        <p:spPr>
+          <a:xfrm>
+            <a:off x="274320" y="1508760"/>
+            <a:ext cx="11640312" cy="3474720"/>
+          </a:xfrm>
+          <a:prstGeom prst="rect">
+            <a:avLst/>
+          </a:prstGeom>
+          <a:noFill/>
+        </p:spPr>
+        <p:txBody>
+          <a:bodyPr wrap="square">
+            <a:spAutoFit/>
+          </a:bodyPr>
+          <a:lstStyle/>
+          <a:p>
+            <a:pPr algn="l"/>
+            <a:r>
+              <a:rPr sz="2100" b="0">
+                <a:solidFill>
+                  <a:srgbClr val="1E293B"/>
+                </a:solidFill>
+                <a:latin typeface="Calibri"/>
+              </a:rPr>
+              <a:t>Diện tích ~11 700 ha; cảng nước sâu QN
+FDI: thép, xi măng, SX đa ngành
+Logistics + cao tốc B-N
+Hành lang KT Đông-Tây: Quy Nhơn–TN–Lào</a:t>
+            </a:r>
+          </a:p>
+        </p:txBody>
+      </p:sp>
+      <p:sp>
+        <p:nvSpPr>
+          <p:cNvPr id="7" name="Rectangle 6"/>
+          <p:cNvSpPr/>
+          <p:nvPr/>
+        </p:nvSpPr>
+        <p:spPr>
+          <a:xfrm>
+            <a:off x="274320" y="5120640"/>
+            <a:ext cx="11640312" cy="914400"/>
+          </a:xfrm>
+          <a:prstGeom prst="rect">
+            <a:avLst/>
+          </a:prstGeom>
+          <a:solidFill>
+            <a:srgbClr val="FEF2F2"/>
+          </a:solidFill>
+          <a:ln>
+            <a:noFill/>
+          </a:ln>
+        </p:spPr>
+        <p:style>
+          <a:lnRef idx="1">
+            <a:schemeClr val="accent1"/>
+          </a:lnRef>
+          <a:fillRef idx="3">
+            <a:schemeClr val="accent1"/>
+          </a:fillRef>
+          <a:effectRef idx="2">
+            <a:schemeClr val="accent1"/>
+          </a:effectRef>
+          <a:fontRef idx="minor">
+            <a:schemeClr val="lt1"/>
+          </a:fontRef>
+        </p:style>
+        <p:txBody>
+          <a:bodyPr rtlCol="0" anchor="ctr"/>
+          <a:lstStyle/>
+          <a:p>
+            <a:pPr algn="ctr"/>
+          </a:p>
+        </p:txBody>
+      </p:sp>
+      <p:sp>
+        <p:nvSpPr>
+          <p:cNvPr id="8" name="TextBox 7"/>
+          <p:cNvSpPr txBox="1"/>
+          <p:nvPr/>
+        </p:nvSpPr>
+        <p:spPr>
+          <a:xfrm>
+            <a:off x="365760" y="5166360"/>
+            <a:ext cx="11457432" cy="822960"/>
+          </a:xfrm>
+          <a:prstGeom prst="rect">
+            <a:avLst/>
+          </a:prstGeom>
+          <a:noFill/>
+        </p:spPr>
+        <p:txBody>
+          <a:bodyPr wrap="square">
+            <a:spAutoFit/>
+          </a:bodyPr>
+          <a:lstStyle/>
+          <a:p>
+            <a:pPr algn="l"/>
+            <a:r>
+              <a:rPr sz="2200" b="1">
+                <a:solidFill>
+                  <a:srgbClr val="991B1B"/>
+                </a:solidFill>
+                <a:latin typeface="Arial"/>
+              </a:rPr>
+              <a:t>✦ KKT Nhơn Hội: hình thức tổ chức CN cao nhất tỉnh BĐ</a:t>
+            </a:r>
+          </a:p>
+        </p:txBody>
+      </p:sp>
+    </p:spTree>
+  </p:cSld>
+  <p:clrMapOvr>
+    <a:masterClrMapping/>
+  </p:clrMapOvr>
+</p:sld>
+</file>
+
+<file path=ppt/slides/slide8.xml><?xml version="1.0" encoding="utf-8"?>
 <p:sld xmlns:a="http://schemas.openxmlformats.org/drawingml/2006/main" xmlns:p="http://schemas.openxmlformats.org/presentationml/2006/main" xmlns:r="http://schemas.openxmlformats.org/officeDocument/2006/relationships">
   <p:cSld>
     <p:bg>
@@ -5011,8 +6615,8 @@
         </p:nvSpPr>
         <p:spPr>
           <a:xfrm>
-            <a:off x="457200" y="1463040"/>
-            <a:ext cx="11274552" cy="640080"/>
+            <a:off x="365760" y="1417320"/>
+            <a:ext cx="6858000" cy="640080"/>
           </a:xfrm>
           <a:prstGeom prst="rect">
             <a:avLst/>
@@ -5025,9 +6629,9 @@
           </a:bodyPr>
           <a:lstStyle/>
           <a:p>
-            <a:pPr algn="ctr"/>
-            <a:r>
-              <a:rPr sz="2400" b="0">
+            <a:pPr algn="l"/>
+            <a:r>
+              <a:rPr sz="2200" b="0">
                 <a:solidFill>
                   <a:srgbClr val="1E40AF"/>
                 </a:solidFill>
@@ -5046,8 +6650,8 @@
         </p:nvSpPr>
         <p:spPr>
           <a:xfrm>
-            <a:off x="457200" y="2194560"/>
-            <a:ext cx="11274552" cy="731520"/>
+            <a:off x="365760" y="2103120"/>
+            <a:ext cx="6858000" cy="685800"/>
           </a:xfrm>
           <a:prstGeom prst="rect">
             <a:avLst/>
@@ -5089,8 +6693,8 @@
         </p:nvSpPr>
         <p:spPr>
           <a:xfrm>
-            <a:off x="548640" y="2240280"/>
-            <a:ext cx="11091672" cy="640080"/>
+            <a:off x="457200" y="2176272"/>
+            <a:ext cx="6675120" cy="548640"/>
           </a:xfrm>
           <a:prstGeom prst="rect">
             <a:avLst/>
@@ -5105,13 +6709,13 @@
           <a:p>
             <a:pPr algn="l"/>
             <a:r>
-              <a:rPr sz="2000" b="0">
+              <a:rPr sz="1700" b="0">
                 <a:solidFill>
                   <a:srgbClr val="15783A"/>
                 </a:solidFill>
                 <a:latin typeface="Calibri"/>
               </a:rPr>
-              <a:t>🔗 https://trangtu66.github.io/Taode_thi_online/dia_cc_bai18_k12.html</a:t>
+              <a:t>🔗  https://trangtu66.github.io/Taode_thi_online/dia_cc_bai18_k12.html</a:t>
             </a:r>
           </a:p>
         </p:txBody>
@@ -5124,8 +6728,8 @@
         </p:nvSpPr>
         <p:spPr>
           <a:xfrm>
-            <a:off x="457200" y="3108960"/>
-            <a:ext cx="11274552" cy="594360"/>
+            <a:off x="365760" y="2926080"/>
+            <a:ext cx="6858000" cy="822960"/>
           </a:xfrm>
           <a:prstGeom prst="rect">
             <a:avLst/>
@@ -5138,42 +6742,7 @@
           </a:bodyPr>
           <a:lstStyle/>
           <a:p>
-            <a:pPr algn="ctr"/>
-            <a:r>
-              <a:rPr sz="2200" b="0">
-                <a:solidFill>
-                  <a:srgbClr val="1E293B"/>
-                </a:solidFill>
-                <a:latin typeface="Calibri"/>
-              </a:rPr>
-              <a:t>Quét mã QR hoặc truy cập đường link để làm bài củng cố trực tuyến</a:t>
-            </a:r>
-          </a:p>
-        </p:txBody>
-      </p:sp>
-      <p:sp>
-        <p:nvSpPr>
-          <p:cNvPr id="8" name="TextBox 7"/>
-          <p:cNvSpPr txBox="1"/>
-          <p:nvPr/>
-        </p:nvSpPr>
-        <p:spPr>
-          <a:xfrm>
-            <a:off x="457200" y="3749039"/>
-            <a:ext cx="11274552" cy="548640"/>
-          </a:xfrm>
-          <a:prstGeom prst="rect">
-            <a:avLst/>
-          </a:prstGeom>
-          <a:noFill/>
-        </p:spPr>
-        <p:txBody>
-          <a:bodyPr wrap="square">
-            <a:spAutoFit/>
-          </a:bodyPr>
-          <a:lstStyle/>
-          <a:p>
-            <a:pPr algn="ctr"/>
+            <a:pPr algn="l"/>
             <a:r>
               <a:rPr sz="2000" b="0">
                 <a:solidFill>
@@ -5181,14 +6750,74 @@
                 </a:solidFill>
                 <a:latin typeface="Calibri"/>
               </a:rPr>
-              <a:t>📱 Làm bài trực tuyến – Kết quả ngay lập tức – Theo dõi tiến độ</a:t>
-            </a:r>
-          </a:p>
-        </p:txBody>
-      </p:sp>
-      <p:sp>
-        <p:nvSpPr>
-          <p:cNvPr id="9" name="Rectangle 8"/>
+              <a:t>6 câu trắc nghiệm + 1 câu đúng/sai
+Kết quả ngay lập tức – Xếp hạng lớp</a:t>
+            </a:r>
+          </a:p>
+        </p:txBody>
+      </p:sp>
+      <p:sp>
+        <p:nvSpPr>
+          <p:cNvPr id="8" name="TextBox 7"/>
+          <p:cNvSpPr txBox="1"/>
+          <p:nvPr/>
+        </p:nvSpPr>
+        <p:spPr>
+          <a:xfrm>
+            <a:off x="365760" y="3840480"/>
+            <a:ext cx="6858000" cy="548640"/>
+          </a:xfrm>
+          <a:prstGeom prst="rect">
+            <a:avLst/>
+          </a:prstGeom>
+          <a:noFill/>
+        </p:spPr>
+        <p:txBody>
+          <a:bodyPr wrap="square">
+            <a:spAutoFit/>
+          </a:bodyPr>
+          <a:lstStyle/>
+          <a:p>
+            <a:pPr algn="l"/>
+            <a:r>
+              <a:rPr sz="2200" b="1">
+                <a:solidFill>
+                  <a:srgbClr val="1E40AF"/>
+                </a:solidFill>
+                <a:latin typeface="Arial"/>
+              </a:rPr>
+              <a:t>📱  Quét mã QR để làm bài ngay →</a:t>
+            </a:r>
+          </a:p>
+        </p:txBody>
+      </p:sp>
+      <p:pic>
+        <p:nvPicPr>
+          <p:cNvPr id="9" name="Picture 8" descr="QR_CungCo_DIA12_Bai18.png"/>
+          <p:cNvPicPr>
+            <a:picLocks noChangeAspect="1"/>
+          </p:cNvPicPr>
+          <p:nvPr/>
+        </p:nvPicPr>
+        <p:blipFill>
+          <a:blip r:embed="rId2"/>
+          <a:stretch>
+            <a:fillRect/>
+          </a:stretch>
+        </p:blipFill>
+        <p:spPr>
+          <a:xfrm>
+            <a:off x="7589520" y="1280160"/>
+            <a:ext cx="4114800" cy="4114800"/>
+          </a:xfrm>
+          <a:prstGeom prst="rect">
+            <a:avLst/>
+          </a:prstGeom>
+        </p:spPr>
+      </p:pic>
+      <p:sp>
+        <p:nvSpPr>
+          <p:cNvPr id="10" name="Rectangle 9"/>
           <p:cNvSpPr/>
           <p:nvPr/>
         </p:nvSpPr>
@@ -5231,7 +6860,7 @@
       </p:sp>
       <p:sp>
         <p:nvSpPr>
-          <p:cNvPr id="10" name="TextBox 9"/>
+          <p:cNvPr id="11" name="TextBox 10"/>
           <p:cNvSpPr txBox="1"/>
           <p:nvPr/>
         </p:nvSpPr>

--- a/mon/dia_li/slide/lop12/Slide_DIALY12_Bài_18_Tổ_chức_lãnh_thổ_CN_TT33.pptx
+++ b/mon/dia_li/slide/lop12/Slide_DIALY12_Bài_18_Tổ_chức_lãnh_thổ_CN_TT33.pptx
@@ -3176,7 +3176,7 @@
                 </a:solidFill>
                 <a:latin typeface="Arial"/>
               </a:rPr>
-              <a:t>TRƯỜNG THPT VĨNH THẠNH  |  ĐỊA LÍ 12  |  NĂM HỌC 2026–2027</a:t>
+              <a:t>TRƯỜNG THPT|  ĐỊA LÍ 12  |  NĂM HỌC 2026–2027</a:t>
             </a:r>
           </a:p>
         </p:txBody>
@@ -3281,7 +3281,7 @@
                 </a:solidFill>
                 <a:latin typeface="Calibri"/>
               </a:rPr>
-              <a:t>Giáo viên: Lê Thuỳ Dung</a:t>
+              <a:t>Giáo viên: ……………</a:t>
             </a:r>
           </a:p>
         </p:txBody>
@@ -3359,7 +3359,7 @@
                 </a:solidFill>
                 <a:latin typeface="Calibri"/>
               </a:rPr>
-              <a:t>Trường THPT Vĩnh Thạnh – Bình Định</a:t>
+              <a:t>Trường THPT – Bình Định</a:t>
             </a:r>
           </a:p>
         </p:txBody>
@@ -3793,7 +3793,7 @@
                 </a:solidFill>
                 <a:latin typeface="Arial"/>
               </a:rPr>
-              <a:t>SO DO TU DUY</a:t>
+              <a:t>SƠ ĐỒ TƯ DUY</a:t>
             </a:r>
           </a:p>
         </p:txBody>
@@ -3833,60 +3833,30 @@
           </a:p>
         </p:txBody>
       </p:sp>
-      <p:sp>
-        <p:nvSpPr>
-          <p:cNvPr id="5" name="Rounded Rectangle 4"/>
-          <p:cNvSpPr/>
-          <p:nvPr/>
-        </p:nvSpPr>
-        <p:spPr>
-          <a:xfrm>
-            <a:off x="3808476" y="804672"/>
-            <a:ext cx="4572000" cy="640080"/>
-          </a:xfrm>
-          <a:prstGeom prst="roundRect">
-            <a:avLst/>
-          </a:prstGeom>
-          <a:solidFill>
-            <a:srgbClr val="1E40AF"/>
-          </a:solidFill>
-          <a:ln>
-            <a:solidFill>
-              <a:srgbClr val="1E40AF"/>
-            </a:solidFill>
-          </a:ln>
-        </p:spPr>
-        <p:style>
-          <a:lnRef idx="1">
-            <a:schemeClr val="accent1"/>
-          </a:lnRef>
-          <a:fillRef idx="3">
-            <a:schemeClr val="accent1"/>
-          </a:fillRef>
-          <a:effectRef idx="2">
-            <a:schemeClr val="accent1"/>
-          </a:effectRef>
-          <a:fontRef idx="minor">
-            <a:schemeClr val="lt1"/>
-          </a:fontRef>
-        </p:style>
-        <p:txBody>
-          <a:bodyPr rtlCol="0" anchor="ctr" wrap="none"/>
-          <a:lstStyle/>
-          <a:p>
-            <a:pPr algn="ctr"/>
-            <a:r>
-              <a:rPr sz="1600" b="1">
-                <a:solidFill>
-                  <a:srgbClr val="FFFFFF"/>
-                </a:solidFill>
-                <a:latin typeface="Arial"/>
-              </a:rPr>
-              <a:t>Bài 18. Tổ chức lãnh thổ CN</a:t>
-            </a:r>
-          </a:p>
-        </p:txBody>
-      </p:sp>
+      <p:pic>
+        <p:nvPicPr>
+          <p:cNvPr id="5" name="Picture 4" descr="_qr_dia_cc_bai18_k12.html.png"/>
+          <p:cNvPicPr>
+            <a:picLocks noChangeAspect="1"/>
+          </p:cNvPicPr>
+          <p:nvPr/>
+        </p:nvPicPr>
+        <p:blipFill>
+          <a:blip r:embed="rId2"/>
+          <a:stretch>
+            <a:fillRect/>
+          </a:stretch>
+        </p:blipFill>
+        <p:spPr>
+          <a:xfrm>
+            <a:off x="9674352" y="1463040"/>
+            <a:ext cx="2286000" cy="2286000"/>
+          </a:xfrm>
+          <a:prstGeom prst="rect">
+            <a:avLst/>
+          </a:prstGeom>
+        </p:spPr>
+      </p:pic>
       <p:cxnSp>
         <p:nvCxnSpPr>
           <p:cNvPr id="6" name="Connector 5"/>
@@ -3894,16 +3864,16 @@
           <p:nvPr/>
         </p:nvCxnSpPr>
         <p:spPr>
-          <a:xfrm flipH="1">
-            <a:off x="1412748.0" y="1124712.0"/>
-            <a:ext cx="4681728.0" cy="864108.0"/>
+          <a:xfrm flipH="1" flipV="1">
+            <a:off x="3508857" y="2670962"/>
+            <a:ext cx="1351179" cy="1283818"/>
           </a:xfrm>
           <a:prstGeom prst="line">
             <a:avLst/>
           </a:prstGeom>
-          <a:ln w="22860">
+          <a:ln w="44450">
             <a:solidFill>
-              <a:srgbClr val="7C3AED"/>
+              <a:srgbClr val="548235"/>
             </a:solidFill>
           </a:ln>
         </p:spPr>
@@ -3922,77 +3892,23 @@
           </a:fontRef>
         </p:style>
       </p:cxnSp>
-      <p:sp>
-        <p:nvSpPr>
-          <p:cNvPr id="7" name="Oval 6"/>
-          <p:cNvSpPr/>
-          <p:nvPr/>
-        </p:nvSpPr>
-        <p:spPr>
-          <a:xfrm>
-            <a:off x="109728" y="1691640"/>
-            <a:ext cx="2606040" cy="594360"/>
-          </a:xfrm>
-          <a:prstGeom prst="ellipse">
-            <a:avLst/>
-          </a:prstGeom>
-          <a:solidFill>
-            <a:srgbClr val="7C3AED"/>
-          </a:solidFill>
-          <a:ln>
-            <a:solidFill>
-              <a:srgbClr val="7C3AED"/>
-            </a:solidFill>
-          </a:ln>
-        </p:spPr>
-        <p:style>
-          <a:lnRef idx="1">
-            <a:schemeClr val="accent1"/>
-          </a:lnRef>
-          <a:fillRef idx="3">
-            <a:schemeClr val="accent1"/>
-          </a:fillRef>
-          <a:effectRef idx="2">
-            <a:schemeClr val="accent1"/>
-          </a:effectRef>
-          <a:fontRef idx="minor">
-            <a:schemeClr val="lt1"/>
-          </a:fontRef>
-        </p:style>
-        <p:txBody>
-          <a:bodyPr rtlCol="0" anchor="ctr" wrap="square"/>
-          <a:lstStyle/>
-          <a:p>
-            <a:pPr algn="ctr"/>
-            <a:r>
-              <a:rPr sz="1300" b="1">
-                <a:solidFill>
-                  <a:srgbClr val="FFFFFF"/>
-                </a:solidFill>
-                <a:latin typeface="Arial"/>
-              </a:rPr>
-              <a:t>Các hình thức tổ chức</a:t>
-            </a:r>
-          </a:p>
-        </p:txBody>
-      </p:sp>
       <p:cxnSp>
         <p:nvCxnSpPr>
-          <p:cNvPr id="8" name="Connector 7"/>
+          <p:cNvPr id="7" name="Connector 6"/>
           <p:cNvCxnSpPr/>
           <p:nvPr/>
         </p:nvCxnSpPr>
         <p:spPr>
-          <a:xfrm flipV="1">
-            <a:off x="1412748.0" y="1568196.0"/>
-            <a:ext cx="2839212.0" cy="420624.0"/>
+          <a:xfrm flipH="1" flipV="1">
+            <a:off x="2197384" y="2244872"/>
+            <a:ext cx="1311473" cy="426090"/>
           </a:xfrm>
           <a:prstGeom prst="line">
             <a:avLst/>
           </a:prstGeom>
-          <a:ln w="12700">
+          <a:ln w="15875">
             <a:solidFill>
-              <a:srgbClr val="7C3AED"/>
+              <a:srgbClr val="548235"/>
             </a:solidFill>
           </a:ln>
         </p:spPr>
@@ -4013,26 +3929,29 @@
       </p:cxnSp>
       <p:sp>
         <p:nvSpPr>
-          <p:cNvPr id="9" name="Rounded Rectangle 8"/>
+          <p:cNvPr id="8" name="Rounded Rectangle 7"/>
           <p:cNvSpPr/>
           <p:nvPr/>
         </p:nvSpPr>
         <p:spPr>
           <a:xfrm>
-            <a:off x="2880360" y="1399032"/>
-            <a:ext cx="2743200" cy="338328"/>
+            <a:off x="766795" y="2069271"/>
+            <a:ext cx="1430588" cy="351200"/>
           </a:xfrm>
           <a:prstGeom prst="roundRect">
-            <a:avLst/>
+            <a:avLst>
+              <a:gd name="adj" fmla="val 50000"/>
+            </a:avLst>
           </a:prstGeom>
           <a:solidFill>
-            <a:srgbClr val="EDE9FE"/>
+            <a:srgbClr val="EDF5E8"/>
           </a:solidFill>
-          <a:ln>
+          <a:ln w="15875">
             <a:solidFill>
-              <a:srgbClr val="EDE9FE"/>
+              <a:srgbClr val="548235"/>
             </a:solidFill>
           </a:ln>
+          <a:effectLst/>
         </p:spPr>
         <p:style>
           <a:lnRef idx="1">
@@ -4049,14 +3968,14 @@
           </a:fontRef>
         </p:style>
         <p:txBody>
-          <a:bodyPr rtlCol="0" anchor="ctr" wrap="square"/>
-          <a:lstStyle/>
-          <a:p>
-            <a:pPr algn="l"/>
-            <a:r>
-              <a:rPr sz="1200" b="0">
-                <a:solidFill>
-                  <a:srgbClr val="4C1D95"/>
+          <a:bodyPr rtlCol="0" anchor="ctr" wrap="none" lIns="64000" rIns="64000" tIns="25400" bIns="25400"/>
+          <a:lstStyle/>
+          <a:p>
+            <a:pPr algn="ctr"/>
+            <a:r>
+              <a:rPr sz="1300" b="0">
+                <a:solidFill>
+                  <a:srgbClr val="000000"/>
                 </a:solidFill>
                 <a:latin typeface="Calibri"/>
               </a:rPr>
@@ -4067,21 +3986,21 @@
       </p:sp>
       <p:cxnSp>
         <p:nvCxnSpPr>
-          <p:cNvPr id="10" name="Connector 9"/>
+          <p:cNvPr id="9" name="Connector 8"/>
           <p:cNvCxnSpPr/>
           <p:nvPr/>
         </p:nvCxnSpPr>
         <p:spPr>
-          <a:xfrm>
-            <a:off x="1412748.0" y="1988820.0"/>
-            <a:ext cx="2839212.0" cy="0.0"/>
+          <a:xfrm flipH="1">
+            <a:off x="2154458" y="2670962"/>
+            <a:ext cx="1354399" cy="0"/>
           </a:xfrm>
           <a:prstGeom prst="line">
             <a:avLst/>
           </a:prstGeom>
-          <a:ln w="12700">
+          <a:ln w="15875">
             <a:solidFill>
-              <a:srgbClr val="7C3AED"/>
+              <a:srgbClr val="548235"/>
             </a:solidFill>
           </a:ln>
         </p:spPr>
@@ -4102,26 +4021,29 @@
       </p:cxnSp>
       <p:sp>
         <p:nvSpPr>
-          <p:cNvPr id="11" name="Rounded Rectangle 10"/>
+          <p:cNvPr id="10" name="Rounded Rectangle 9"/>
           <p:cNvSpPr/>
           <p:nvPr/>
         </p:nvSpPr>
         <p:spPr>
           <a:xfrm>
-            <a:off x="2880360" y="1819656"/>
-            <a:ext cx="2743200" cy="338328"/>
+            <a:off x="809721" y="2495362"/>
+            <a:ext cx="1344736" cy="351200"/>
           </a:xfrm>
           <a:prstGeom prst="roundRect">
-            <a:avLst/>
+            <a:avLst>
+              <a:gd name="adj" fmla="val 50000"/>
+            </a:avLst>
           </a:prstGeom>
           <a:solidFill>
-            <a:srgbClr val="EDE9FE"/>
+            <a:srgbClr val="EDF5E8"/>
           </a:solidFill>
-          <a:ln>
+          <a:ln w="15875">
             <a:solidFill>
-              <a:srgbClr val="EDE9FE"/>
+              <a:srgbClr val="548235"/>
             </a:solidFill>
           </a:ln>
+          <a:effectLst/>
         </p:spPr>
         <p:style>
           <a:lnRef idx="1">
@@ -4138,14 +4060,14 @@
           </a:fontRef>
         </p:style>
         <p:txBody>
-          <a:bodyPr rtlCol="0" anchor="ctr" wrap="square"/>
-          <a:lstStyle/>
-          <a:p>
-            <a:pPr algn="l"/>
-            <a:r>
-              <a:rPr sz="1200" b="0">
-                <a:solidFill>
-                  <a:srgbClr val="4C1D95"/>
+          <a:bodyPr rtlCol="0" anchor="ctr" wrap="none" lIns="64000" rIns="64000" tIns="25400" bIns="25400"/>
+          <a:lstStyle/>
+          <a:p>
+            <a:pPr algn="ctr"/>
+            <a:r>
+              <a:rPr sz="1300" b="0">
+                <a:solidFill>
+                  <a:srgbClr val="000000"/>
                 </a:solidFill>
                 <a:latin typeface="Calibri"/>
               </a:rPr>
@@ -4156,21 +4078,21 @@
       </p:sp>
       <p:cxnSp>
         <p:nvCxnSpPr>
-          <p:cNvPr id="12" name="Connector 11"/>
+          <p:cNvPr id="11" name="Connector 10"/>
           <p:cNvCxnSpPr/>
           <p:nvPr/>
         </p:nvCxnSpPr>
         <p:spPr>
-          <a:xfrm>
-            <a:off x="1412748.0" y="1988820.0"/>
-            <a:ext cx="2839212.0" cy="420624.0"/>
+          <a:xfrm flipH="1">
+            <a:off x="2111532" y="2670962"/>
+            <a:ext cx="1397325" cy="426090"/>
           </a:xfrm>
           <a:prstGeom prst="line">
             <a:avLst/>
           </a:prstGeom>
-          <a:ln w="12700">
+          <a:ln w="15875">
             <a:solidFill>
-              <a:srgbClr val="7C3AED"/>
+              <a:srgbClr val="548235"/>
             </a:solidFill>
           </a:ln>
         </p:spPr>
@@ -4191,26 +4113,29 @@
       </p:cxnSp>
       <p:sp>
         <p:nvSpPr>
-          <p:cNvPr id="13" name="Rounded Rectangle 12"/>
+          <p:cNvPr id="12" name="Rounded Rectangle 11"/>
           <p:cNvSpPr/>
           <p:nvPr/>
         </p:nvSpPr>
         <p:spPr>
           <a:xfrm>
-            <a:off x="2880360" y="2240280"/>
-            <a:ext cx="2743200" cy="338328"/>
+            <a:off x="852647" y="2921452"/>
+            <a:ext cx="1258884" cy="351200"/>
           </a:xfrm>
           <a:prstGeom prst="roundRect">
-            <a:avLst/>
+            <a:avLst>
+              <a:gd name="adj" fmla="val 50000"/>
+            </a:avLst>
           </a:prstGeom>
           <a:solidFill>
-            <a:srgbClr val="EDE9FE"/>
+            <a:srgbClr val="EDF5E8"/>
           </a:solidFill>
-          <a:ln>
+          <a:ln w="15875">
             <a:solidFill>
-              <a:srgbClr val="EDE9FE"/>
+              <a:srgbClr val="548235"/>
             </a:solidFill>
           </a:ln>
+          <a:effectLst/>
         </p:spPr>
         <p:style>
           <a:lnRef idx="1">
@@ -4227,18 +4152,85 @@
           </a:fontRef>
         </p:style>
         <p:txBody>
-          <a:bodyPr rtlCol="0" anchor="ctr" wrap="square"/>
-          <a:lstStyle/>
-          <a:p>
-            <a:pPr algn="l"/>
-            <a:r>
-              <a:rPr sz="1200" b="0">
-                <a:solidFill>
-                  <a:srgbClr val="4C1D95"/>
+          <a:bodyPr rtlCol="0" anchor="ctr" wrap="none" lIns="64000" rIns="64000" tIns="25400" bIns="25400"/>
+          <a:lstStyle/>
+          <a:p>
+            <a:pPr algn="ctr"/>
+            <a:r>
+              <a:rPr sz="1300" b="0">
+                <a:solidFill>
+                  <a:srgbClr val="000000"/>
                 </a:solidFill>
                 <a:latin typeface="Calibri"/>
               </a:rPr>
               <a:t>KKT ven biển</a:t>
+            </a:r>
+          </a:p>
+        </p:txBody>
+      </p:sp>
+      <p:sp>
+        <p:nvSpPr>
+          <p:cNvPr id="13" name="Oval 12"/>
+          <p:cNvSpPr/>
+          <p:nvPr/>
+        </p:nvSpPr>
+        <p:spPr>
+          <a:xfrm>
+            <a:off x="2493081" y="2259078"/>
+            <a:ext cx="2031552" cy="823767"/>
+          </a:xfrm>
+          <a:prstGeom prst="ellipse">
+            <a:avLst/>
+          </a:prstGeom>
+          <a:solidFill>
+            <a:srgbClr val="E2EFDA"/>
+          </a:solidFill>
+          <a:ln w="31750">
+            <a:solidFill>
+              <a:srgbClr val="375623"/>
+            </a:solidFill>
+          </a:ln>
+          <a:effectLst/>
+        </p:spPr>
+        <p:style>
+          <a:lnRef idx="1">
+            <a:schemeClr val="accent1"/>
+          </a:lnRef>
+          <a:fillRef idx="3">
+            <a:schemeClr val="accent1"/>
+          </a:fillRef>
+          <a:effectRef idx="2">
+            <a:schemeClr val="accent1"/>
+          </a:effectRef>
+          <a:fontRef idx="minor">
+            <a:schemeClr val="lt1"/>
+          </a:fontRef>
+        </p:style>
+        <p:txBody>
+          <a:bodyPr rtlCol="0" anchor="ctr" wrap="none" lIns="64000" rIns="64000" tIns="25400" bIns="25400"/>
+          <a:lstStyle/>
+          <a:p>
+            <a:pPr algn="ctr"/>
+            <a:r>
+              <a:rPr sz="1500" b="1">
+                <a:solidFill>
+                  <a:srgbClr val="000000"/>
+                </a:solidFill>
+                <a:latin typeface="Calibri"/>
+              </a:rPr>
+              <a:t>Các hình thức</a:t>
+            </a:r>
+          </a:p>
+          <a:p>
+            <a:pPr algn="ctr"/>
+            <a:r>
+              <a:rPr sz="1500" b="1">
+                <a:solidFill>
+                  <a:srgbClr val="000000"/>
+                </a:solidFill>
+                <a:latin typeface="Calibri"/>
+              </a:rPr>
+              <a:t>tổ chức</a:t>
             </a:r>
           </a:p>
         </p:txBody>
@@ -4250,16 +4242,16 @@
           <p:nvPr/>
         </p:nvCxnSpPr>
         <p:spPr>
-          <a:xfrm flipH="1">
-            <a:off x="1412748.0" y="1124712.0"/>
-            <a:ext cx="4681728.0" cy="3058668.0"/>
+          <a:xfrm flipV="1">
+            <a:off x="4860036" y="2670962"/>
+            <a:ext cx="1351178" cy="1283818"/>
           </a:xfrm>
           <a:prstGeom prst="line">
             <a:avLst/>
           </a:prstGeom>
-          <a:ln w="22860">
+          <a:ln w="44450">
             <a:solidFill>
-              <a:srgbClr val="065F46"/>
+              <a:srgbClr val="BF8F00"/>
             </a:solidFill>
           </a:ln>
         </p:spPr>
@@ -4278,77 +4270,23 @@
           </a:fontRef>
         </p:style>
       </p:cxnSp>
-      <p:sp>
-        <p:nvSpPr>
-          <p:cNvPr id="15" name="Oval 14"/>
-          <p:cNvSpPr/>
-          <p:nvPr/>
-        </p:nvSpPr>
-        <p:spPr>
-          <a:xfrm>
-            <a:off x="109728" y="3886200"/>
-            <a:ext cx="2606040" cy="594360"/>
-          </a:xfrm>
-          <a:prstGeom prst="ellipse">
-            <a:avLst/>
-          </a:prstGeom>
-          <a:solidFill>
-            <a:srgbClr val="065F46"/>
-          </a:solidFill>
-          <a:ln>
-            <a:solidFill>
-              <a:srgbClr val="065F46"/>
-            </a:solidFill>
-          </a:ln>
-        </p:spPr>
-        <p:style>
-          <a:lnRef idx="1">
-            <a:schemeClr val="accent1"/>
-          </a:lnRef>
-          <a:fillRef idx="3">
-            <a:schemeClr val="accent1"/>
-          </a:fillRef>
-          <a:effectRef idx="2">
-            <a:schemeClr val="accent1"/>
-          </a:effectRef>
-          <a:fontRef idx="minor">
-            <a:schemeClr val="lt1"/>
-          </a:fontRef>
-        </p:style>
-        <p:txBody>
-          <a:bodyPr rtlCol="0" anchor="ctr" wrap="square"/>
-          <a:lstStyle/>
-          <a:p>
-            <a:pPr algn="ctr"/>
-            <a:r>
-              <a:rPr sz="1300" b="1">
-                <a:solidFill>
-                  <a:srgbClr val="FFFFFF"/>
-                </a:solidFill>
-                <a:latin typeface="Arial"/>
-              </a:rPr>
-              <a:t>KCN VN</a:t>
-            </a:r>
-          </a:p>
-        </p:txBody>
-      </p:sp>
       <p:cxnSp>
         <p:nvCxnSpPr>
-          <p:cNvPr id="16" name="Connector 15"/>
+          <p:cNvPr id="15" name="Connector 14"/>
           <p:cNvCxnSpPr/>
           <p:nvPr/>
         </p:nvCxnSpPr>
         <p:spPr>
           <a:xfrm flipV="1">
-            <a:off x="1412748.0" y="3762756.0"/>
-            <a:ext cx="2839212.0" cy="420624.0"/>
+            <a:off x="6211214" y="2244872"/>
+            <a:ext cx="1225621" cy="426090"/>
           </a:xfrm>
           <a:prstGeom prst="line">
             <a:avLst/>
           </a:prstGeom>
-          <a:ln w="12700">
+          <a:ln w="15875">
             <a:solidFill>
-              <a:srgbClr val="065F46"/>
+              <a:srgbClr val="BF8F00"/>
             </a:solidFill>
           </a:ln>
         </p:spPr>
@@ -4369,26 +4307,29 @@
       </p:cxnSp>
       <p:sp>
         <p:nvSpPr>
-          <p:cNvPr id="17" name="Rounded Rectangle 16"/>
+          <p:cNvPr id="16" name="Rounded Rectangle 15"/>
           <p:cNvSpPr/>
           <p:nvPr/>
         </p:nvSpPr>
         <p:spPr>
           <a:xfrm>
-            <a:off x="2880360" y="3593592"/>
-            <a:ext cx="2743200" cy="338328"/>
+            <a:off x="7436835" y="2069271"/>
+            <a:ext cx="1602292" cy="351200"/>
           </a:xfrm>
           <a:prstGeom prst="roundRect">
-            <a:avLst/>
+            <a:avLst>
+              <a:gd name="adj" fmla="val 50000"/>
+            </a:avLst>
           </a:prstGeom>
           <a:solidFill>
-            <a:srgbClr val="D1FAE5"/>
+            <a:srgbClr val="FFF8E1"/>
           </a:solidFill>
-          <a:ln>
+          <a:ln w="15875">
             <a:solidFill>
-              <a:srgbClr val="D1FAE5"/>
+              <a:srgbClr val="BF8F00"/>
             </a:solidFill>
           </a:ln>
+          <a:effectLst/>
         </p:spPr>
         <p:style>
           <a:lnRef idx="1">
@@ -4405,14 +4346,14 @@
           </a:fontRef>
         </p:style>
         <p:txBody>
-          <a:bodyPr rtlCol="0" anchor="ctr" wrap="square"/>
-          <a:lstStyle/>
-          <a:p>
-            <a:pPr algn="l"/>
-            <a:r>
-              <a:rPr sz="1200" b="0">
-                <a:solidFill>
-                  <a:srgbClr val="022C22"/>
+          <a:bodyPr rtlCol="0" anchor="ctr" wrap="none" lIns="64000" rIns="64000" tIns="25400" bIns="25400"/>
+          <a:lstStyle/>
+          <a:p>
+            <a:pPr algn="ctr"/>
+            <a:r>
+              <a:rPr sz="1300" b="0">
+                <a:solidFill>
+                  <a:srgbClr val="000000"/>
                 </a:solidFill>
                 <a:latin typeface="Calibri"/>
               </a:rPr>
@@ -4423,21 +4364,21 @@
       </p:sp>
       <p:cxnSp>
         <p:nvCxnSpPr>
-          <p:cNvPr id="18" name="Connector 17"/>
+          <p:cNvPr id="17" name="Connector 16"/>
           <p:cNvCxnSpPr/>
           <p:nvPr/>
         </p:nvCxnSpPr>
         <p:spPr>
           <a:xfrm>
-            <a:off x="1412748.0" y="4183380.0"/>
-            <a:ext cx="2839212.0" cy="0.0"/>
+            <a:off x="6211214" y="2670962"/>
+            <a:ext cx="1182695" cy="0"/>
           </a:xfrm>
           <a:prstGeom prst="line">
             <a:avLst/>
           </a:prstGeom>
-          <a:ln w="12700">
+          <a:ln w="15875">
             <a:solidFill>
-              <a:srgbClr val="065F46"/>
+              <a:srgbClr val="BF8F00"/>
             </a:solidFill>
           </a:ln>
         </p:spPr>
@@ -4458,26 +4399,29 @@
       </p:cxnSp>
       <p:sp>
         <p:nvSpPr>
-          <p:cNvPr id="19" name="Rounded Rectangle 18"/>
+          <p:cNvPr id="18" name="Rounded Rectangle 17"/>
           <p:cNvSpPr/>
           <p:nvPr/>
         </p:nvSpPr>
         <p:spPr>
           <a:xfrm>
-            <a:off x="2880360" y="4014216"/>
-            <a:ext cx="2743200" cy="338328"/>
+            <a:off x="7393909" y="2495362"/>
+            <a:ext cx="1688144" cy="351200"/>
           </a:xfrm>
           <a:prstGeom prst="roundRect">
-            <a:avLst/>
+            <a:avLst>
+              <a:gd name="adj" fmla="val 50000"/>
+            </a:avLst>
           </a:prstGeom>
           <a:solidFill>
-            <a:srgbClr val="D1FAE5"/>
+            <a:srgbClr val="FFF8E1"/>
           </a:solidFill>
-          <a:ln>
+          <a:ln w="15875">
             <a:solidFill>
-              <a:srgbClr val="D1FAE5"/>
+              <a:srgbClr val="BF8F00"/>
             </a:solidFill>
           </a:ln>
+          <a:effectLst/>
         </p:spPr>
         <p:style>
           <a:lnRef idx="1">
@@ -4494,14 +4438,14 @@
           </a:fontRef>
         </p:style>
         <p:txBody>
-          <a:bodyPr rtlCol="0" anchor="ctr" wrap="square"/>
-          <a:lstStyle/>
-          <a:p>
-            <a:pPr algn="l"/>
-            <a:r>
-              <a:rPr sz="1200" b="0">
-                <a:solidFill>
-                  <a:srgbClr val="022C22"/>
+          <a:bodyPr rtlCol="0" anchor="ctr" wrap="none" lIns="64000" rIns="64000" tIns="25400" bIns="25400"/>
+          <a:lstStyle/>
+          <a:p>
+            <a:pPr algn="ctr"/>
+            <a:r>
+              <a:rPr sz="1300" b="0">
+                <a:solidFill>
+                  <a:srgbClr val="000000"/>
                 </a:solidFill>
                 <a:latin typeface="Calibri"/>
               </a:rPr>
@@ -4512,21 +4456,21 @@
       </p:sp>
       <p:cxnSp>
         <p:nvCxnSpPr>
-          <p:cNvPr id="20" name="Connector 19"/>
+          <p:cNvPr id="19" name="Connector 18"/>
           <p:cNvCxnSpPr/>
           <p:nvPr/>
         </p:nvCxnSpPr>
         <p:spPr>
           <a:xfrm>
-            <a:off x="1412748.0" y="4183380.0"/>
-            <a:ext cx="2839212.0" cy="420624.0"/>
+            <a:off x="6211214" y="2670962"/>
+            <a:ext cx="1225621" cy="426090"/>
           </a:xfrm>
           <a:prstGeom prst="line">
             <a:avLst/>
           </a:prstGeom>
-          <a:ln w="12700">
+          <a:ln w="15875">
             <a:solidFill>
-              <a:srgbClr val="065F46"/>
+              <a:srgbClr val="BF8F00"/>
             </a:solidFill>
           </a:ln>
         </p:spPr>
@@ -4547,26 +4491,29 @@
       </p:cxnSp>
       <p:sp>
         <p:nvSpPr>
-          <p:cNvPr id="21" name="Rounded Rectangle 20"/>
+          <p:cNvPr id="20" name="Rounded Rectangle 19"/>
           <p:cNvSpPr/>
           <p:nvPr/>
         </p:nvSpPr>
         <p:spPr>
           <a:xfrm>
-            <a:off x="2880360" y="4434840"/>
-            <a:ext cx="2743200" cy="338328"/>
+            <a:off x="7436835" y="2921452"/>
+            <a:ext cx="1602292" cy="351200"/>
           </a:xfrm>
           <a:prstGeom prst="roundRect">
-            <a:avLst/>
+            <a:avLst>
+              <a:gd name="adj" fmla="val 50000"/>
+            </a:avLst>
           </a:prstGeom>
           <a:solidFill>
-            <a:srgbClr val="D1FAE5"/>
+            <a:srgbClr val="FFF8E1"/>
           </a:solidFill>
-          <a:ln>
+          <a:ln w="15875">
             <a:solidFill>
-              <a:srgbClr val="D1FAE5"/>
+              <a:srgbClr val="BF8F00"/>
             </a:solidFill>
           </a:ln>
+          <a:effectLst/>
         </p:spPr>
         <p:style>
           <a:lnRef idx="1">
@@ -4583,18 +4530,73 @@
           </a:fontRef>
         </p:style>
         <p:txBody>
-          <a:bodyPr rtlCol="0" anchor="ctr" wrap="square"/>
-          <a:lstStyle/>
-          <a:p>
-            <a:pPr algn="l"/>
-            <a:r>
-              <a:rPr sz="1200" b="0">
-                <a:solidFill>
-                  <a:srgbClr val="022C22"/>
+          <a:bodyPr rtlCol="0" anchor="ctr" wrap="none" lIns="64000" rIns="64000" tIns="25400" bIns="25400"/>
+          <a:lstStyle/>
+          <a:p>
+            <a:pPr algn="ctr"/>
+            <a:r>
+              <a:rPr sz="1300" b="0">
+                <a:solidFill>
+                  <a:srgbClr val="000000"/>
                 </a:solidFill>
                 <a:latin typeface="Calibri"/>
               </a:rPr>
               <a:t>Vùng Bắc Ninh-HN</a:t>
+            </a:r>
+          </a:p>
+        </p:txBody>
+      </p:sp>
+      <p:sp>
+        <p:nvSpPr>
+          <p:cNvPr id="21" name="Oval 20"/>
+          <p:cNvSpPr/>
+          <p:nvPr/>
+        </p:nvSpPr>
+        <p:spPr>
+          <a:xfrm>
+            <a:off x="5680831" y="2427575"/>
+            <a:ext cx="1060764" cy="486773"/>
+          </a:xfrm>
+          <a:prstGeom prst="ellipse">
+            <a:avLst/>
+          </a:prstGeom>
+          <a:solidFill>
+            <a:srgbClr val="FFF2CC"/>
+          </a:solidFill>
+          <a:ln w="31750">
+            <a:solidFill>
+              <a:srgbClr val="BF8F00"/>
+            </a:solidFill>
+          </a:ln>
+          <a:effectLst/>
+        </p:spPr>
+        <p:style>
+          <a:lnRef idx="1">
+            <a:schemeClr val="accent1"/>
+          </a:lnRef>
+          <a:fillRef idx="3">
+            <a:schemeClr val="accent1"/>
+          </a:fillRef>
+          <a:effectRef idx="2">
+            <a:schemeClr val="accent1"/>
+          </a:effectRef>
+          <a:fontRef idx="minor">
+            <a:schemeClr val="lt1"/>
+          </a:fontRef>
+        </p:style>
+        <p:txBody>
+          <a:bodyPr rtlCol="0" anchor="ctr" wrap="none" lIns="64000" rIns="64000" tIns="25400" bIns="25400"/>
+          <a:lstStyle/>
+          <a:p>
+            <a:pPr algn="ctr"/>
+            <a:r>
+              <a:rPr sz="1500" b="1">
+                <a:solidFill>
+                  <a:srgbClr val="000000"/>
+                </a:solidFill>
+                <a:latin typeface="Calibri"/>
+              </a:rPr>
+              <a:t>KCN VN</a:t>
             </a:r>
           </a:p>
         </p:txBody>
@@ -4606,16 +4608,16 @@
           <p:nvPr/>
         </p:nvCxnSpPr>
         <p:spPr>
-          <a:xfrm>
-            <a:off x="6094476.0" y="1124712.0"/>
-            <a:ext cx="4681728.0" cy="864108.0"/>
+          <a:xfrm flipH="1">
+            <a:off x="3508857" y="3954780"/>
+            <a:ext cx="1351179" cy="1283817"/>
           </a:xfrm>
           <a:prstGeom prst="line">
             <a:avLst/>
           </a:prstGeom>
-          <a:ln w="22860">
+          <a:ln w="44450">
             <a:solidFill>
-              <a:srgbClr val="B91C1C"/>
+              <a:srgbClr val="2F5597"/>
             </a:solidFill>
           </a:ln>
         </p:spPr>
@@ -4634,77 +4636,23 @@
           </a:fontRef>
         </p:style>
       </p:cxnSp>
-      <p:sp>
-        <p:nvSpPr>
-          <p:cNvPr id="23" name="Oval 22"/>
-          <p:cNvSpPr/>
-          <p:nvPr/>
-        </p:nvSpPr>
-        <p:spPr>
-          <a:xfrm>
-            <a:off x="9473184" y="1691640"/>
-            <a:ext cx="2606040" cy="594360"/>
-          </a:xfrm>
-          <a:prstGeom prst="ellipse">
-            <a:avLst/>
-          </a:prstGeom>
-          <a:solidFill>
-            <a:srgbClr val="B91C1C"/>
-          </a:solidFill>
-          <a:ln>
-            <a:solidFill>
-              <a:srgbClr val="B91C1C"/>
-            </a:solidFill>
-          </a:ln>
-        </p:spPr>
-        <p:style>
-          <a:lnRef idx="1">
-            <a:schemeClr val="accent1"/>
-          </a:lnRef>
-          <a:fillRef idx="3">
-            <a:schemeClr val="accent1"/>
-          </a:fillRef>
-          <a:effectRef idx="2">
-            <a:schemeClr val="accent1"/>
-          </a:effectRef>
-          <a:fontRef idx="minor">
-            <a:schemeClr val="lt1"/>
-          </a:fontRef>
-        </p:style>
-        <p:txBody>
-          <a:bodyPr rtlCol="0" anchor="ctr" wrap="square"/>
-          <a:lstStyle/>
-          <a:p>
-            <a:pPr algn="ctr"/>
-            <a:r>
-              <a:rPr sz="1300" b="1">
-                <a:solidFill>
-                  <a:srgbClr val="FFFFFF"/>
-                </a:solidFill>
-                <a:latin typeface="Arial"/>
-              </a:rPr>
-              <a:t>18 KKT ven biển</a:t>
-            </a:r>
-          </a:p>
-        </p:txBody>
-      </p:sp>
       <p:cxnSp>
         <p:nvCxnSpPr>
-          <p:cNvPr id="24" name="Connector 23"/>
+          <p:cNvPr id="23" name="Connector 22"/>
           <p:cNvCxnSpPr/>
           <p:nvPr/>
         </p:nvCxnSpPr>
         <p:spPr>
           <a:xfrm flipH="1" flipV="1">
-            <a:off x="7936992.0" y="1568196.0"/>
-            <a:ext cx="2839212.0" cy="420624.0"/>
+            <a:off x="2326162" y="4812507"/>
+            <a:ext cx="1182695" cy="426090"/>
           </a:xfrm>
           <a:prstGeom prst="line">
             <a:avLst/>
           </a:prstGeom>
-          <a:ln w="12700">
+          <a:ln w="15875">
             <a:solidFill>
-              <a:srgbClr val="B91C1C"/>
+              <a:srgbClr val="2F5597"/>
             </a:solidFill>
           </a:ln>
         </p:spPr>
@@ -4725,26 +4673,29 @@
       </p:cxnSp>
       <p:sp>
         <p:nvSpPr>
-          <p:cNvPr id="25" name="Rounded Rectangle 24"/>
+          <p:cNvPr id="24" name="Rounded Rectangle 23"/>
           <p:cNvSpPr/>
           <p:nvPr/>
         </p:nvSpPr>
         <p:spPr>
           <a:xfrm>
-            <a:off x="6565392" y="1399032"/>
-            <a:ext cx="2743200" cy="338328"/>
+            <a:off x="638017" y="4636907"/>
+            <a:ext cx="1688144" cy="351200"/>
           </a:xfrm>
           <a:prstGeom prst="roundRect">
-            <a:avLst/>
+            <a:avLst>
+              <a:gd name="adj" fmla="val 50000"/>
+            </a:avLst>
           </a:prstGeom>
           <a:solidFill>
-            <a:srgbClr val="FEE2E2"/>
+            <a:srgbClr val="E3EEF9"/>
           </a:solidFill>
-          <a:ln>
+          <a:ln w="15875">
             <a:solidFill>
-              <a:srgbClr val="FEE2E2"/>
+              <a:srgbClr val="2F5597"/>
             </a:solidFill>
           </a:ln>
+          <a:effectLst/>
         </p:spPr>
         <p:style>
           <a:lnRef idx="1">
@@ -4761,14 +4712,14 @@
           </a:fontRef>
         </p:style>
         <p:txBody>
-          <a:bodyPr rtlCol="0" anchor="ctr" wrap="square"/>
-          <a:lstStyle/>
-          <a:p>
-            <a:pPr algn="l"/>
-            <a:r>
-              <a:rPr sz="1200" b="0">
-                <a:solidFill>
-                  <a:srgbClr val="450A0A"/>
+          <a:bodyPr rtlCol="0" anchor="ctr" wrap="none" lIns="64000" rIns="64000" tIns="25400" bIns="25400"/>
+          <a:lstStyle/>
+          <a:p>
+            <a:pPr algn="ctr"/>
+            <a:r>
+              <a:rPr sz="1300" b="0">
+                <a:solidFill>
+                  <a:srgbClr val="000000"/>
                 </a:solidFill>
                 <a:latin typeface="Calibri"/>
               </a:rPr>
@@ -4779,21 +4730,21 @@
       </p:sp>
       <p:cxnSp>
         <p:nvCxnSpPr>
-          <p:cNvPr id="26" name="Connector 25"/>
+          <p:cNvPr id="25" name="Connector 24"/>
           <p:cNvCxnSpPr/>
           <p:nvPr/>
         </p:nvCxnSpPr>
         <p:spPr>
           <a:xfrm flipH="1">
-            <a:off x="7936992.0" y="1988820.0"/>
-            <a:ext cx="2839212.0" cy="0.0"/>
+            <a:off x="2111532" y="5238597"/>
+            <a:ext cx="1397325" cy="0"/>
           </a:xfrm>
           <a:prstGeom prst="line">
             <a:avLst/>
           </a:prstGeom>
-          <a:ln w="12700">
+          <a:ln w="15875">
             <a:solidFill>
-              <a:srgbClr val="B91C1C"/>
+              <a:srgbClr val="2F5597"/>
             </a:solidFill>
           </a:ln>
         </p:spPr>
@@ -4814,26 +4765,29 @@
       </p:cxnSp>
       <p:sp>
         <p:nvSpPr>
-          <p:cNvPr id="27" name="Rounded Rectangle 26"/>
+          <p:cNvPr id="26" name="Rounded Rectangle 25"/>
           <p:cNvSpPr/>
           <p:nvPr/>
         </p:nvSpPr>
         <p:spPr>
           <a:xfrm>
-            <a:off x="6565392" y="1819656"/>
-            <a:ext cx="2743200" cy="338328"/>
+            <a:off x="852647" y="5062997"/>
+            <a:ext cx="1258884" cy="351200"/>
           </a:xfrm>
           <a:prstGeom prst="roundRect">
-            <a:avLst/>
+            <a:avLst>
+              <a:gd name="adj" fmla="val 50000"/>
+            </a:avLst>
           </a:prstGeom>
           <a:solidFill>
-            <a:srgbClr val="FEE2E2"/>
+            <a:srgbClr val="E3EEF9"/>
           </a:solidFill>
-          <a:ln>
+          <a:ln w="15875">
             <a:solidFill>
-              <a:srgbClr val="FEE2E2"/>
+              <a:srgbClr val="2F5597"/>
             </a:solidFill>
           </a:ln>
+          <a:effectLst/>
         </p:spPr>
         <p:style>
           <a:lnRef idx="1">
@@ -4850,14 +4804,14 @@
           </a:fontRef>
         </p:style>
         <p:txBody>
-          <a:bodyPr rtlCol="0" anchor="ctr" wrap="square"/>
-          <a:lstStyle/>
-          <a:p>
-            <a:pPr algn="l"/>
-            <a:r>
-              <a:rPr sz="1200" b="0">
-                <a:solidFill>
-                  <a:srgbClr val="450A0A"/>
+          <a:bodyPr rtlCol="0" anchor="ctr" wrap="none" lIns="64000" rIns="64000" tIns="25400" bIns="25400"/>
+          <a:lstStyle/>
+          <a:p>
+            <a:pPr algn="ctr"/>
+            <a:r>
+              <a:rPr sz="1300" b="0">
+                <a:solidFill>
+                  <a:srgbClr val="000000"/>
                 </a:solidFill>
                 <a:latin typeface="Calibri"/>
               </a:rPr>
@@ -4868,21 +4822,21 @@
       </p:sp>
       <p:cxnSp>
         <p:nvCxnSpPr>
-          <p:cNvPr id="28" name="Connector 27"/>
+          <p:cNvPr id="27" name="Connector 26"/>
           <p:cNvCxnSpPr/>
           <p:nvPr/>
         </p:nvCxnSpPr>
         <p:spPr>
           <a:xfrm flipH="1">
-            <a:off x="7936992.0" y="1988820.0"/>
-            <a:ext cx="2839212.0" cy="420624.0"/>
+            <a:off x="2326162" y="5238597"/>
+            <a:ext cx="1182695" cy="426090"/>
           </a:xfrm>
           <a:prstGeom prst="line">
             <a:avLst/>
           </a:prstGeom>
-          <a:ln w="12700">
+          <a:ln w="15875">
             <a:solidFill>
-              <a:srgbClr val="B91C1C"/>
+              <a:srgbClr val="2F5597"/>
             </a:solidFill>
           </a:ln>
         </p:spPr>
@@ -4903,26 +4857,29 @@
       </p:cxnSp>
       <p:sp>
         <p:nvSpPr>
-          <p:cNvPr id="29" name="Rounded Rectangle 28"/>
+          <p:cNvPr id="28" name="Rounded Rectangle 27"/>
           <p:cNvSpPr/>
           <p:nvPr/>
         </p:nvSpPr>
         <p:spPr>
           <a:xfrm>
-            <a:off x="6565392" y="2240280"/>
-            <a:ext cx="2743200" cy="338328"/>
+            <a:off x="638017" y="5489087"/>
+            <a:ext cx="1688144" cy="351200"/>
           </a:xfrm>
           <a:prstGeom prst="roundRect">
-            <a:avLst/>
+            <a:avLst>
+              <a:gd name="adj" fmla="val 50000"/>
+            </a:avLst>
           </a:prstGeom>
           <a:solidFill>
-            <a:srgbClr val="FEE2E2"/>
+            <a:srgbClr val="E3EEF9"/>
           </a:solidFill>
-          <a:ln>
+          <a:ln w="15875">
             <a:solidFill>
-              <a:srgbClr val="FEE2E2"/>
+              <a:srgbClr val="2F5597"/>
             </a:solidFill>
           </a:ln>
+          <a:effectLst/>
         </p:spPr>
         <p:style>
           <a:lnRef idx="1">
@@ -4939,18 +4896,85 @@
           </a:fontRef>
         </p:style>
         <p:txBody>
-          <a:bodyPr rtlCol="0" anchor="ctr" wrap="square"/>
-          <a:lstStyle/>
-          <a:p>
-            <a:pPr algn="l"/>
-            <a:r>
-              <a:rPr sz="1200" b="0">
-                <a:solidFill>
-                  <a:srgbClr val="450A0A"/>
+          <a:bodyPr rtlCol="0" anchor="ctr" wrap="none" lIns="64000" rIns="64000" tIns="25400" bIns="25400"/>
+          <a:lstStyle/>
+          <a:p>
+            <a:pPr algn="ctr"/>
+            <a:r>
+              <a:rPr sz="1300" b="0">
+                <a:solidFill>
+                  <a:srgbClr val="000000"/>
                 </a:solidFill>
                 <a:latin typeface="Calibri"/>
               </a:rPr>
               <a:t>Kết nối cảng biển</a:t>
+            </a:r>
+          </a:p>
+        </p:txBody>
+      </p:sp>
+      <p:sp>
+        <p:nvSpPr>
+          <p:cNvPr id="29" name="Oval 28"/>
+          <p:cNvSpPr/>
+          <p:nvPr/>
+        </p:nvSpPr>
+        <p:spPr>
+          <a:xfrm>
+            <a:off x="2701107" y="4826713"/>
+            <a:ext cx="1615500" cy="823767"/>
+          </a:xfrm>
+          <a:prstGeom prst="ellipse">
+            <a:avLst/>
+          </a:prstGeom>
+          <a:solidFill>
+            <a:srgbClr val="E2EFDA"/>
+          </a:solidFill>
+          <a:ln w="31750">
+            <a:solidFill>
+              <a:srgbClr val="375623"/>
+            </a:solidFill>
+          </a:ln>
+          <a:effectLst/>
+        </p:spPr>
+        <p:style>
+          <a:lnRef idx="1">
+            <a:schemeClr val="accent1"/>
+          </a:lnRef>
+          <a:fillRef idx="3">
+            <a:schemeClr val="accent1"/>
+          </a:fillRef>
+          <a:effectRef idx="2">
+            <a:schemeClr val="accent1"/>
+          </a:effectRef>
+          <a:fontRef idx="minor">
+            <a:schemeClr val="lt1"/>
+          </a:fontRef>
+        </p:style>
+        <p:txBody>
+          <a:bodyPr rtlCol="0" anchor="ctr" wrap="none" lIns="64000" rIns="64000" tIns="25400" bIns="25400"/>
+          <a:lstStyle/>
+          <a:p>
+            <a:pPr algn="ctr"/>
+            <a:r>
+              <a:rPr sz="1500" b="1">
+                <a:solidFill>
+                  <a:srgbClr val="000000"/>
+                </a:solidFill>
+                <a:latin typeface="Calibri"/>
+              </a:rPr>
+              <a:t>18 KKT ven</a:t>
+            </a:r>
+          </a:p>
+          <a:p>
+            <a:pPr algn="ctr"/>
+            <a:r>
+              <a:rPr sz="1500" b="1">
+                <a:solidFill>
+                  <a:srgbClr val="000000"/>
+                </a:solidFill>
+                <a:latin typeface="Calibri"/>
+              </a:rPr>
+              <a:t>biển</a:t>
             </a:r>
           </a:p>
         </p:txBody>
@@ -4963,15 +4987,15 @@
         </p:nvCxnSpPr>
         <p:spPr>
           <a:xfrm>
-            <a:off x="6094476.0" y="1124712.0"/>
-            <a:ext cx="4681728.0" cy="3058668.0"/>
+            <a:off x="4860036" y="3954780"/>
+            <a:ext cx="1351178" cy="1283817"/>
           </a:xfrm>
           <a:prstGeom prst="line">
             <a:avLst/>
           </a:prstGeom>
-          <a:ln w="22860">
+          <a:ln w="44450">
             <a:solidFill>
-              <a:srgbClr val="B45309"/>
+              <a:srgbClr val="7030A0"/>
             </a:solidFill>
           </a:ln>
         </p:spPr>
@@ -4990,77 +5014,23 @@
           </a:fontRef>
         </p:style>
       </p:cxnSp>
-      <p:sp>
-        <p:nvSpPr>
-          <p:cNvPr id="31" name="Oval 30"/>
-          <p:cNvSpPr/>
-          <p:nvPr/>
-        </p:nvSpPr>
-        <p:spPr>
-          <a:xfrm>
-            <a:off x="9473184" y="3886200"/>
-            <a:ext cx="2606040" cy="594360"/>
-          </a:xfrm>
-          <a:prstGeom prst="ellipse">
-            <a:avLst/>
-          </a:prstGeom>
-          <a:solidFill>
-            <a:srgbClr val="B45309"/>
-          </a:solidFill>
-          <a:ln>
-            <a:solidFill>
-              <a:srgbClr val="B45309"/>
-            </a:solidFill>
-          </a:ln>
-        </p:spPr>
-        <p:style>
-          <a:lnRef idx="1">
-            <a:schemeClr val="accent1"/>
-          </a:lnRef>
-          <a:fillRef idx="3">
-            <a:schemeClr val="accent1"/>
-          </a:fillRef>
-          <a:effectRef idx="2">
-            <a:schemeClr val="accent1"/>
-          </a:effectRef>
-          <a:fontRef idx="minor">
-            <a:schemeClr val="lt1"/>
-          </a:fontRef>
-        </p:style>
-        <p:txBody>
-          <a:bodyPr rtlCol="0" anchor="ctr" wrap="square"/>
-          <a:lstStyle/>
-          <a:p>
-            <a:pPr algn="ctr"/>
-            <a:r>
-              <a:rPr sz="1300" b="1">
-                <a:solidFill>
-                  <a:srgbClr val="FFFFFF"/>
-                </a:solidFill>
-                <a:latin typeface="Arial"/>
-              </a:rPr>
-              <a:t>KKT Nhơn Hội</a:t>
-            </a:r>
-          </a:p>
-        </p:txBody>
-      </p:sp>
       <p:cxnSp>
         <p:nvCxnSpPr>
-          <p:cNvPr id="32" name="Connector 31"/>
+          <p:cNvPr id="31" name="Connector 30"/>
           <p:cNvCxnSpPr/>
           <p:nvPr/>
         </p:nvCxnSpPr>
         <p:spPr>
-          <a:xfrm flipH="1" flipV="1">
-            <a:off x="7936992.0" y="3762756.0"/>
-            <a:ext cx="2839212.0" cy="420624.0"/>
+          <a:xfrm flipV="1">
+            <a:off x="6211214" y="4812507"/>
+            <a:ext cx="1526103" cy="426090"/>
           </a:xfrm>
           <a:prstGeom prst="line">
             <a:avLst/>
           </a:prstGeom>
-          <a:ln w="12700">
+          <a:ln w="15875">
             <a:solidFill>
-              <a:srgbClr val="B45309"/>
+              <a:srgbClr val="7030A0"/>
             </a:solidFill>
           </a:ln>
         </p:spPr>
@@ -5081,26 +5051,29 @@
       </p:cxnSp>
       <p:sp>
         <p:nvSpPr>
-          <p:cNvPr id="33" name="Rounded Rectangle 32"/>
+          <p:cNvPr id="32" name="Rounded Rectangle 31"/>
           <p:cNvSpPr/>
           <p:nvPr/>
         </p:nvSpPr>
         <p:spPr>
           <a:xfrm>
-            <a:off x="6565392" y="3593592"/>
-            <a:ext cx="2743200" cy="338328"/>
+            <a:off x="7737317" y="4636907"/>
+            <a:ext cx="1001328" cy="351200"/>
           </a:xfrm>
           <a:prstGeom prst="roundRect">
-            <a:avLst/>
+            <a:avLst>
+              <a:gd name="adj" fmla="val 50000"/>
+            </a:avLst>
           </a:prstGeom>
           <a:solidFill>
-            <a:srgbClr val="FEF3C7"/>
+            <a:srgbClr val="F3E8F7"/>
           </a:solidFill>
-          <a:ln>
+          <a:ln w="15875">
             <a:solidFill>
-              <a:srgbClr val="FEF3C7"/>
+              <a:srgbClr val="7030A0"/>
             </a:solidFill>
           </a:ln>
+          <a:effectLst/>
         </p:spPr>
         <p:style>
           <a:lnRef idx="1">
@@ -5117,14 +5090,14 @@
           </a:fontRef>
         </p:style>
         <p:txBody>
-          <a:bodyPr rtlCol="0" anchor="ctr" wrap="square"/>
-          <a:lstStyle/>
-          <a:p>
-            <a:pPr algn="l"/>
-            <a:r>
-              <a:rPr sz="1200" b="0">
-                <a:solidFill>
-                  <a:srgbClr val="451A03"/>
+          <a:bodyPr rtlCol="0" anchor="ctr" wrap="none" lIns="64000" rIns="64000" tIns="25400" bIns="25400"/>
+          <a:lstStyle/>
+          <a:p>
+            <a:pPr algn="ctr"/>
+            <a:r>
+              <a:rPr sz="1300" b="0">
+                <a:solidFill>
+                  <a:srgbClr val="000000"/>
                 </a:solidFill>
                 <a:latin typeface="Calibri"/>
               </a:rPr>
@@ -5135,21 +5108,21 @@
       </p:sp>
       <p:cxnSp>
         <p:nvCxnSpPr>
-          <p:cNvPr id="34" name="Connector 33"/>
+          <p:cNvPr id="33" name="Connector 32"/>
           <p:cNvCxnSpPr/>
           <p:nvPr/>
         </p:nvCxnSpPr>
         <p:spPr>
-          <a:xfrm flipH="1">
-            <a:off x="7936992.0" y="4183380.0"/>
-            <a:ext cx="2839212.0" cy="0.0"/>
+          <a:xfrm>
+            <a:off x="6211214" y="5238597"/>
+            <a:ext cx="1225621" cy="0"/>
           </a:xfrm>
           <a:prstGeom prst="line">
             <a:avLst/>
           </a:prstGeom>
-          <a:ln w="12700">
+          <a:ln w="15875">
             <a:solidFill>
-              <a:srgbClr val="B45309"/>
+              <a:srgbClr val="7030A0"/>
             </a:solidFill>
           </a:ln>
         </p:spPr>
@@ -5170,26 +5143,29 @@
       </p:cxnSp>
       <p:sp>
         <p:nvSpPr>
-          <p:cNvPr id="35" name="Rounded Rectangle 34"/>
+          <p:cNvPr id="34" name="Rounded Rectangle 33"/>
           <p:cNvSpPr/>
           <p:nvPr/>
         </p:nvSpPr>
         <p:spPr>
           <a:xfrm>
-            <a:off x="6565392" y="4014216"/>
-            <a:ext cx="2743200" cy="338328"/>
+            <a:off x="7436835" y="5062997"/>
+            <a:ext cx="1602292" cy="351200"/>
           </a:xfrm>
           <a:prstGeom prst="roundRect">
-            <a:avLst/>
+            <a:avLst>
+              <a:gd name="adj" fmla="val 50000"/>
+            </a:avLst>
           </a:prstGeom>
           <a:solidFill>
-            <a:srgbClr val="FEF3C7"/>
+            <a:srgbClr val="F3E8F7"/>
           </a:solidFill>
-          <a:ln>
+          <a:ln w="15875">
             <a:solidFill>
-              <a:srgbClr val="FEF3C7"/>
+              <a:srgbClr val="7030A0"/>
             </a:solidFill>
           </a:ln>
+          <a:effectLst/>
         </p:spPr>
         <p:style>
           <a:lnRef idx="1">
@@ -5206,14 +5182,14 @@
           </a:fontRef>
         </p:style>
         <p:txBody>
-          <a:bodyPr rtlCol="0" anchor="ctr" wrap="square"/>
-          <a:lstStyle/>
-          <a:p>
-            <a:pPr algn="l"/>
-            <a:r>
-              <a:rPr sz="1200" b="0">
-                <a:solidFill>
-                  <a:srgbClr val="451A03"/>
+          <a:bodyPr rtlCol="0" anchor="ctr" wrap="none" lIns="64000" rIns="64000" tIns="25400" bIns="25400"/>
+          <a:lstStyle/>
+          <a:p>
+            <a:pPr algn="ctr"/>
+            <a:r>
+              <a:rPr sz="1300" b="0">
+                <a:solidFill>
+                  <a:srgbClr val="000000"/>
                 </a:solidFill>
                 <a:latin typeface="Calibri"/>
               </a:rPr>
@@ -5224,21 +5200,21 @@
       </p:sp>
       <p:cxnSp>
         <p:nvCxnSpPr>
-          <p:cNvPr id="36" name="Connector 35"/>
+          <p:cNvPr id="35" name="Connector 34"/>
           <p:cNvCxnSpPr/>
           <p:nvPr/>
         </p:nvCxnSpPr>
         <p:spPr>
-          <a:xfrm flipH="1">
-            <a:off x="7936992.0" y="4183380.0"/>
-            <a:ext cx="2839212.0" cy="420624.0"/>
+          <a:xfrm>
+            <a:off x="6211214" y="5238597"/>
+            <a:ext cx="1010991" cy="426090"/>
           </a:xfrm>
           <a:prstGeom prst="line">
             <a:avLst/>
           </a:prstGeom>
-          <a:ln w="12700">
+          <a:ln w="15875">
             <a:solidFill>
-              <a:srgbClr val="B45309"/>
+              <a:srgbClr val="7030A0"/>
             </a:solidFill>
           </a:ln>
         </p:spPr>
@@ -5259,26 +5235,29 @@
       </p:cxnSp>
       <p:sp>
         <p:nvSpPr>
-          <p:cNvPr id="37" name="Rounded Rectangle 36"/>
+          <p:cNvPr id="36" name="Rounded Rectangle 35"/>
           <p:cNvSpPr/>
           <p:nvPr/>
         </p:nvSpPr>
         <p:spPr>
           <a:xfrm>
-            <a:off x="6565392" y="4434840"/>
-            <a:ext cx="2743200" cy="338328"/>
+            <a:off x="7222205" y="5489087"/>
+            <a:ext cx="2031552" cy="351200"/>
           </a:xfrm>
           <a:prstGeom prst="roundRect">
-            <a:avLst/>
+            <a:avLst>
+              <a:gd name="adj" fmla="val 50000"/>
+            </a:avLst>
           </a:prstGeom>
           <a:solidFill>
-            <a:srgbClr val="FEF3C7"/>
+            <a:srgbClr val="F3E8F7"/>
           </a:solidFill>
-          <a:ln>
+          <a:ln w="15875">
             <a:solidFill>
-              <a:srgbClr val="FEF3C7"/>
+              <a:srgbClr val="7030A0"/>
             </a:solidFill>
           </a:ln>
+          <a:effectLst/>
         </p:spPr>
         <p:style>
           <a:lnRef idx="1">
@@ -5295,18 +5274,152 @@
           </a:fontRef>
         </p:style>
         <p:txBody>
-          <a:bodyPr rtlCol="0" anchor="ctr" wrap="square"/>
-          <a:lstStyle/>
-          <a:p>
-            <a:pPr algn="l"/>
-            <a:r>
-              <a:rPr sz="1200" b="0">
-                <a:solidFill>
-                  <a:srgbClr val="451A03"/>
+          <a:bodyPr rtlCol="0" anchor="ctr" wrap="none" lIns="64000" rIns="64000" tIns="25400" bIns="25400"/>
+          <a:lstStyle/>
+          <a:p>
+            <a:pPr algn="ctr"/>
+            <a:r>
+              <a:rPr sz="1300" b="0">
+                <a:solidFill>
+                  <a:srgbClr val="000000"/>
                 </a:solidFill>
                 <a:latin typeface="Calibri"/>
               </a:rPr>
               <a:t>Hành lang ĐT Đông-Tây</a:t>
+            </a:r>
+          </a:p>
+        </p:txBody>
+      </p:sp>
+      <p:sp>
+        <p:nvSpPr>
+          <p:cNvPr id="37" name="Oval 36"/>
+          <p:cNvSpPr/>
+          <p:nvPr/>
+        </p:nvSpPr>
+        <p:spPr>
+          <a:xfrm>
+            <a:off x="5264779" y="4995210"/>
+            <a:ext cx="1892868" cy="486773"/>
+          </a:xfrm>
+          <a:prstGeom prst="ellipse">
+            <a:avLst/>
+          </a:prstGeom>
+          <a:solidFill>
+            <a:srgbClr val="FFF2CC"/>
+          </a:solidFill>
+          <a:ln w="31750">
+            <a:solidFill>
+              <a:srgbClr val="BF8F00"/>
+            </a:solidFill>
+          </a:ln>
+          <a:effectLst/>
+        </p:spPr>
+        <p:style>
+          <a:lnRef idx="1">
+            <a:schemeClr val="accent1"/>
+          </a:lnRef>
+          <a:fillRef idx="3">
+            <a:schemeClr val="accent1"/>
+          </a:fillRef>
+          <a:effectRef idx="2">
+            <a:schemeClr val="accent1"/>
+          </a:effectRef>
+          <a:fontRef idx="minor">
+            <a:schemeClr val="lt1"/>
+          </a:fontRef>
+        </p:style>
+        <p:txBody>
+          <a:bodyPr rtlCol="0" anchor="ctr" wrap="none" lIns="64000" rIns="64000" tIns="25400" bIns="25400"/>
+          <a:lstStyle/>
+          <a:p>
+            <a:pPr algn="ctr"/>
+            <a:r>
+              <a:rPr sz="1500" b="1">
+                <a:solidFill>
+                  <a:srgbClr val="000000"/>
+                </a:solidFill>
+                <a:latin typeface="Calibri"/>
+              </a:rPr>
+              <a:t>KKT Nhơn Hội</a:t>
+            </a:r>
+          </a:p>
+        </p:txBody>
+      </p:sp>
+      <p:sp>
+        <p:nvSpPr>
+          <p:cNvPr id="38" name="Oval 37"/>
+          <p:cNvSpPr/>
+          <p:nvPr/>
+        </p:nvSpPr>
+        <p:spPr>
+          <a:xfrm>
+            <a:off x="3724066" y="3287245"/>
+            <a:ext cx="2271938" cy="1335069"/>
+          </a:xfrm>
+          <a:prstGeom prst="ellipse">
+            <a:avLst/>
+          </a:prstGeom>
+          <a:solidFill>
+            <a:srgbClr val="002060"/>
+          </a:solidFill>
+          <a:ln w="25400">
+            <a:solidFill>
+              <a:srgbClr val="000B1E"/>
+            </a:solidFill>
+          </a:ln>
+          <a:effectLst/>
+        </p:spPr>
+        <p:style>
+          <a:lnRef idx="1">
+            <a:schemeClr val="accent1"/>
+          </a:lnRef>
+          <a:fillRef idx="3">
+            <a:schemeClr val="accent1"/>
+          </a:fillRef>
+          <a:effectRef idx="2">
+            <a:schemeClr val="accent1"/>
+          </a:effectRef>
+          <a:fontRef idx="minor">
+            <a:schemeClr val="lt1"/>
+          </a:fontRef>
+        </p:style>
+        <p:txBody>
+          <a:bodyPr rtlCol="0" anchor="ctr" wrap="none" lIns="64000" rIns="64000" tIns="25400" bIns="25400"/>
+          <a:lstStyle/>
+          <a:p>
+            <a:pPr algn="ctr"/>
+            <a:r>
+              <a:rPr sz="1700" b="1">
+                <a:solidFill>
+                  <a:srgbClr val="FFFFFF"/>
+                </a:solidFill>
+                <a:latin typeface="Calibri"/>
+              </a:rPr>
+              <a:t>BÀI 18. TỔ</a:t>
+            </a:r>
+          </a:p>
+          <a:p>
+            <a:pPr algn="ctr"/>
+            <a:r>
+              <a:rPr sz="1700" b="1">
+                <a:solidFill>
+                  <a:srgbClr val="FFFFFF"/>
+                </a:solidFill>
+                <a:latin typeface="Calibri"/>
+              </a:rPr>
+              <a:t>CHỨC LÃNH THỔ</a:t>
+            </a:r>
+          </a:p>
+          <a:p>
+            <a:pPr algn="ctr"/>
+            <a:r>
+              <a:rPr sz="1700" b="1">
+                <a:solidFill>
+                  <a:srgbClr val="FFFFFF"/>
+                </a:solidFill>
+                <a:latin typeface="Calibri"/>
+              </a:rPr>
+              <a:t>CN</a:t>
             </a:r>
           </a:p>
         </p:txBody>
@@ -6888,7 +7001,7 @@
                 </a:solidFill>
                 <a:latin typeface="Calibri"/>
               </a:rPr>
-              <a:t>Chúc các em học tốt! – THPT Vĩnh Thạnh</a:t>
+              <a:t>Chúc các em học tốt! – Trường THPT</a:t>
             </a:r>
           </a:p>
         </p:txBody>
